--- a/slides/landing-wide.pptx
+++ b/slides/landing-wide.pptx
@@ -12,6 +12,8 @@
     <p:sldId id="257" r:id="rIdS2"/>
     <p:sldId id="258" r:id="rIdS3"/>
     <p:sldId id="259" r:id="rIdS4"/>
+    <p:sldId id="260" r:id="rIdS5"/>
+    <p:sldId id="261" r:id="rIdS6"/>
   </p:sldIdLst>
   <p:sldSz cx="16256000" cy="9144000"/>
   <p:notesSz cx="6858000" cy="9144000"/>
@@ -2400,6 +2402,37 @@
                 <a:latin typeface="Calibri"/>
                 <a:cs typeface="Calibri"/>
               </a:rPr>
+              <a:t>Writer. Slides. Sheets.</a:t>
+            </a:r>
+            <a:endParaRPr lang="en-US" sz="3000" b="0" i="0" u="none" strike="noStrike" dirty="0">
+              <a:solidFill>
+                <a:srgbClr val="FFFFFF"/>
+              </a:solidFill>
+              <a:latin typeface="Calibri"/>
+              <a:cs typeface="Calibri"/>
+            </a:endParaRPr>
+          </a:p>
+          <a:p>
+            <a:pPr algn="l" marL="0" indent="0">
+              <a:lnSpc>
+                <a:spcPct val="100000"/>
+              </a:lnSpc>
+              <a:spcBef>
+                <a:spcPts val="0"/>
+              </a:spcBef>
+              <a:spcAft>
+                <a:spcPts val="0"/>
+              </a:spcAft>
+              <a:buNone/>
+            </a:pPr>
+            <a:r>
+              <a:rPr lang="en-US" sz="3000" b="0" i="0" u="none" strike="noStrike" dirty="0">
+                <a:solidFill>
+                  <a:srgbClr val="FFFFFF"/>
+                </a:solidFill>
+                <a:latin typeface="Calibri"/>
+                <a:cs typeface="Calibri"/>
+              </a:rPr>
               <a:t>An open source office suite.</a:t>
             </a:r>
             <a:endParaRPr lang="en-US" sz="3000" b="0" i="0" u="none" strike="noStrike" dirty="0">
@@ -2410,98 +2443,18 @@
               <a:cs typeface="Calibri"/>
             </a:endParaRPr>
           </a:p>
-          <a:p>
-            <a:pPr algn="l" marL="0" indent="0">
-              <a:lnSpc>
-                <a:spcPct val="100000"/>
-              </a:lnSpc>
-              <a:spcBef>
-                <a:spcPts val="0"/>
-              </a:spcBef>
-              <a:spcAft>
-                <a:spcPts val="0"/>
-              </a:spcAft>
-              <a:buNone/>
-            </a:pPr>
-            <a:r>
-              <a:rPr lang="en-US" sz="3000" b="0" i="0" u="none" strike="noStrike" dirty="0">
-                <a:solidFill>
-                  <a:srgbClr val="FFFFFF"/>
-                </a:solidFill>
-                <a:latin typeface="Calibri"/>
-                <a:cs typeface="Calibri"/>
-              </a:rPr>
-              <a:t>Starting with Writer.</a:t>
-            </a:r>
-            <a:endParaRPr lang="en-US" sz="3000" b="0" i="0" u="none" strike="noStrike" dirty="0">
-              <a:solidFill>
-                <a:srgbClr val="FFFFFF"/>
-              </a:solidFill>
-              <a:latin typeface="Calibri"/>
-              <a:cs typeface="Calibri"/>
-            </a:endParaRPr>
-          </a:p>
-        </p:txBody>
-      </p:sp>
-      <p:sp>
-        <p:nvSpPr>
-          <p:cNvPr id="5" name="Rectangle 8"/>
+        </p:txBody>
+      </p:sp>
+      <p:sp>
+        <p:nvSpPr>
+          <p:cNvPr id="5" name="Rounded Rectangle 8"/>
           <p:cNvSpPr/>
           <p:nvPr/>
         </p:nvSpPr>
         <p:spPr>
-          <a:xfrm rot="-600000">
-            <a:off x="10693400" y="2425700"/>
-            <a:ext cx="3556000" cy="4445000"/>
-          </a:xfrm>
-          <a:prstGeom prst="rect">
-            <a:avLst/>
-          </a:prstGeom>
-          <a:solidFill>
-            <a:srgbClr val="92ADFF"/>
-          </a:solidFill>
-          <a:ln>
-            <a:noFill/>
-          </a:ln>
-        </p:spPr>
-        <p:txBody>
-          <a:bodyPr wrap="square" lIns="91440" tIns="45720" rIns="91440" bIns="45720" anchor="ctr" rtlCol="0">
-            <a:noAutofit/>
-          </a:bodyPr>
-          <a:lstStyle/>
-          <a:p>
-            <a:pPr algn="ctr" marL="0" indent="0">
-              <a:lnSpc>
-                <a:spcPct val="100000"/>
-              </a:lnSpc>
-              <a:spcBef>
-                <a:spcPts val="0"/>
-              </a:spcBef>
-              <a:spcAft>
-                <a:spcPts val="0"/>
-              </a:spcAft>
-              <a:buNone/>
-            </a:pPr>
-            <a:endParaRPr lang="en-US" sz="1800" b="0" i="0" u="none" strike="noStrike" dirty="0">
-              <a:solidFill>
-                <a:srgbClr val="FFFFFF"/>
-              </a:solidFill>
-              <a:latin typeface="Calibri"/>
-              <a:cs typeface="Calibri"/>
-            </a:endParaRPr>
-          </a:p>
-        </p:txBody>
-      </p:sp>
-      <p:sp>
-        <p:nvSpPr>
-          <p:cNvPr id="6" name="Rounded Rectangle 9"/>
-          <p:cNvSpPr/>
-          <p:nvPr/>
-        </p:nvSpPr>
-        <p:spPr>
-          <a:xfrm>
-            <a:off x="11049000" y="2349500"/>
-            <a:ext cx="3556000" cy="4445000"/>
+          <a:xfrm>
+            <a:off x="11049000" y="2082800"/>
+            <a:ext cx="4292600" cy="1447800"/>
           </a:xfrm>
           <a:prstGeom prst="roundRect">
             <a:avLst/>
@@ -2543,14 +2496,63 @@
       </p:sp>
       <p:sp>
         <p:nvSpPr>
+          <p:cNvPr id="6" name="Rounded Rectangle 9"/>
+          <p:cNvSpPr/>
+          <p:nvPr/>
+        </p:nvSpPr>
+        <p:spPr>
+          <a:xfrm>
+            <a:off x="11226800" y="2260600"/>
+            <a:ext cx="838200" cy="1092200"/>
+          </a:xfrm>
+          <a:prstGeom prst="roundRect">
+            <a:avLst/>
+          </a:prstGeom>
+          <a:solidFill>
+            <a:srgbClr val="2449DF"/>
+          </a:solidFill>
+          <a:ln>
+            <a:noFill/>
+          </a:ln>
+        </p:spPr>
+        <p:txBody>
+          <a:bodyPr wrap="square" lIns="91440" tIns="45720" rIns="91440" bIns="45720" anchor="ctr" rtlCol="0">
+            <a:noAutofit/>
+          </a:bodyPr>
+          <a:lstStyle/>
+          <a:p>
+            <a:pPr algn="ctr" marL="0" indent="0">
+              <a:lnSpc>
+                <a:spcPct val="100000"/>
+              </a:lnSpc>
+              <a:spcBef>
+                <a:spcPts val="0"/>
+              </a:spcBef>
+              <a:spcAft>
+                <a:spcPts val="0"/>
+              </a:spcAft>
+              <a:buNone/>
+            </a:pPr>
+            <a:endParaRPr lang="en-US" sz="1800" b="0" i="0" u="none" strike="noStrike" dirty="0">
+              <a:solidFill>
+                <a:srgbClr val="FFFFFF"/>
+              </a:solidFill>
+              <a:latin typeface="Calibri"/>
+              <a:cs typeface="Calibri"/>
+            </a:endParaRPr>
+          </a:p>
+        </p:txBody>
+      </p:sp>
+      <p:sp>
+        <p:nvSpPr>
           <p:cNvPr id="7" name="TextBox 10"/>
           <p:cNvSpPr txBox="1"/>
           <p:nvPr/>
         </p:nvSpPr>
         <p:spPr>
           <a:xfrm>
-            <a:off x="11328400" y="2552700"/>
-            <a:ext cx="3175000" cy="6591300"/>
+            <a:off x="11417300" y="2438400"/>
+            <a:ext cx="711200" cy="6705600"/>
           </a:xfrm>
           <a:prstGeom prst="rect">
             <a:avLst/>
@@ -2579,41 +2581,155 @@
               <a:buNone/>
             </a:pPr>
             <a:r>
-              <a:rPr lang="en-US" sz="7800" b="1" i="0" u="none" strike="noStrike" dirty="0">
-                <a:solidFill>
-                  <a:srgbClr val="2449DF"/>
+              <a:rPr lang="en-US" sz="4500" b="1" i="0" u="none" strike="noStrike" dirty="0">
+                <a:solidFill>
+                  <a:srgbClr val="FFFFFF"/>
                 </a:solidFill>
                 <a:latin typeface="Calibri"/>
                 <a:cs typeface="Calibri"/>
               </a:rPr>
               <a:t>W</a:t>
             </a:r>
-            <a:endParaRPr lang="en-US" sz="7800" b="1" i="0" u="none" strike="noStrike" dirty="0">
-              <a:solidFill>
-                <a:srgbClr val="2449DF"/>
-              </a:solidFill>
-              <a:latin typeface="Calibri"/>
-              <a:cs typeface="Calibri"/>
-            </a:endParaRPr>
-          </a:p>
-        </p:txBody>
-      </p:sp>
-      <p:sp>
-        <p:nvSpPr>
-          <p:cNvPr id="8" name="Rectangle 11"/>
+            <a:endParaRPr lang="en-US" sz="4500" b="1" i="0" u="none" strike="noStrike" dirty="0">
+              <a:solidFill>
+                <a:srgbClr val="FFFFFF"/>
+              </a:solidFill>
+              <a:latin typeface="Calibri"/>
+              <a:cs typeface="Calibri"/>
+            </a:endParaRPr>
+          </a:p>
+        </p:txBody>
+      </p:sp>
+      <p:sp>
+        <p:nvSpPr>
+          <p:cNvPr id="8" name="TextBox 11"/>
+          <p:cNvSpPr txBox="1"/>
+          <p:nvPr/>
+        </p:nvSpPr>
+        <p:spPr>
+          <a:xfrm>
+            <a:off x="12306300" y="2374900"/>
+            <a:ext cx="2794000" cy="6769100"/>
+          </a:xfrm>
+          <a:prstGeom prst="rect">
+            <a:avLst/>
+          </a:prstGeom>
+          <a:noFill/>
+          <a:ln>
+            <a:noFill/>
+          </a:ln>
+        </p:spPr>
+        <p:txBody>
+          <a:bodyPr wrap="square" lIns="0" tIns="0" rIns="0" bIns="0" anchor="t" rtlCol="0">
+            <a:spAutoFit/>
+          </a:bodyPr>
+          <a:lstStyle/>
+          <a:p>
+            <a:pPr algn="l" marL="0" indent="0">
+              <a:lnSpc>
+                <a:spcPct val="100000"/>
+              </a:lnSpc>
+              <a:spcBef>
+                <a:spcPts val="0"/>
+              </a:spcBef>
+              <a:spcAft>
+                <a:spcPts val="0"/>
+              </a:spcAft>
+              <a:buNone/>
+            </a:pPr>
+            <a:r>
+              <a:rPr lang="en-US" sz="3300" b="1" i="0" u="none" strike="noStrike" dirty="0">
+                <a:solidFill>
+                  <a:srgbClr val="132442"/>
+                </a:solidFill>
+                <a:latin typeface="Calibri"/>
+                <a:cs typeface="Calibri"/>
+              </a:rPr>
+              <a:t>Writer</a:t>
+            </a:r>
+            <a:endParaRPr lang="en-US" sz="3300" b="1" i="0" u="none" strike="noStrike" dirty="0">
+              <a:solidFill>
+                <a:srgbClr val="132442"/>
+              </a:solidFill>
+              <a:latin typeface="Calibri"/>
+              <a:cs typeface="Calibri"/>
+            </a:endParaRPr>
+          </a:p>
+        </p:txBody>
+      </p:sp>
+      <p:sp>
+        <p:nvSpPr>
+          <p:cNvPr id="9" name="TextBox 12"/>
+          <p:cNvSpPr txBox="1"/>
+          <p:nvPr/>
+        </p:nvSpPr>
+        <p:spPr>
+          <a:xfrm>
+            <a:off x="12306300" y="2946400"/>
+            <a:ext cx="2794000" cy="6197600"/>
+          </a:xfrm>
+          <a:prstGeom prst="rect">
+            <a:avLst/>
+          </a:prstGeom>
+          <a:noFill/>
+          <a:ln>
+            <a:noFill/>
+          </a:ln>
+        </p:spPr>
+        <p:txBody>
+          <a:bodyPr wrap="square" lIns="0" tIns="0" rIns="0" bIns="0" anchor="t" rtlCol="0">
+            <a:spAutoFit/>
+          </a:bodyPr>
+          <a:lstStyle/>
+          <a:p>
+            <a:pPr algn="l" marL="0" indent="0">
+              <a:lnSpc>
+                <a:spcPct val="100000"/>
+              </a:lnSpc>
+              <a:spcBef>
+                <a:spcPts val="0"/>
+              </a:spcBef>
+              <a:spcAft>
+                <a:spcPts val="0"/>
+              </a:spcAft>
+              <a:buNone/>
+            </a:pPr>
+            <a:r>
+              <a:rPr lang="en-US" sz="1900" b="0" i="0" u="none" strike="noStrike" dirty="0">
+                <a:solidFill>
+                  <a:srgbClr val="536782"/>
+                </a:solidFill>
+                <a:latin typeface="Calibri"/>
+                <a:cs typeface="Calibri"/>
+              </a:rPr>
+              <a:t>Documents</a:t>
+            </a:r>
+            <a:endParaRPr lang="en-US" sz="1900" b="0" i="0" u="none" strike="noStrike" dirty="0">
+              <a:solidFill>
+                <a:srgbClr val="536782"/>
+              </a:solidFill>
+              <a:latin typeface="Calibri"/>
+              <a:cs typeface="Calibri"/>
+            </a:endParaRPr>
+          </a:p>
+        </p:txBody>
+      </p:sp>
+      <p:sp>
+        <p:nvSpPr>
+          <p:cNvPr id="10" name="Rounded Rectangle 13"/>
           <p:cNvSpPr/>
           <p:nvPr/>
         </p:nvSpPr>
         <p:spPr>
           <a:xfrm>
-            <a:off x="11353800" y="4318000"/>
-            <a:ext cx="2946400" cy="76200"/>
-          </a:xfrm>
-          <a:prstGeom prst="rect">
+            <a:off x="11049000" y="3822700"/>
+            <a:ext cx="4292600" cy="1447800"/>
+          </a:xfrm>
+          <a:prstGeom prst="roundRect">
             <a:avLst/>
           </a:prstGeom>
           <a:solidFill>
-            <a:srgbClr val="DDE5F5"/>
+            <a:srgbClr val="FFFFFF"/>
           </a:solidFill>
           <a:ln>
             <a:noFill/>
@@ -2649,20 +2765,20 @@
       </p:sp>
       <p:sp>
         <p:nvSpPr>
-          <p:cNvPr id="9" name="Rectangle 12"/>
+          <p:cNvPr id="11" name="Rounded Rectangle 14"/>
           <p:cNvSpPr/>
           <p:nvPr/>
         </p:nvSpPr>
         <p:spPr>
           <a:xfrm>
-            <a:off x="11353800" y="4622800"/>
-            <a:ext cx="2946400" cy="76200"/>
-          </a:xfrm>
-          <a:prstGeom prst="rect">
+            <a:off x="11226800" y="4000500"/>
+            <a:ext cx="838200" cy="1092200"/>
+          </a:xfrm>
+          <a:prstGeom prst="roundRect">
             <a:avLst/>
           </a:prstGeom>
           <a:solidFill>
-            <a:srgbClr val="DDE5F5"/>
+            <a:srgbClr val="E45B35"/>
           </a:solidFill>
           <a:ln>
             <a:noFill/>
@@ -2698,20 +2814,191 @@
       </p:sp>
       <p:sp>
         <p:nvSpPr>
-          <p:cNvPr id="10" name="Rectangle 13"/>
+          <p:cNvPr id="12" name="TextBox 15"/>
+          <p:cNvSpPr txBox="1"/>
+          <p:nvPr/>
+        </p:nvSpPr>
+        <p:spPr>
+          <a:xfrm>
+            <a:off x="11417300" y="4178300"/>
+            <a:ext cx="711200" cy="4965700"/>
+          </a:xfrm>
+          <a:prstGeom prst="rect">
+            <a:avLst/>
+          </a:prstGeom>
+          <a:noFill/>
+          <a:ln>
+            <a:noFill/>
+          </a:ln>
+        </p:spPr>
+        <p:txBody>
+          <a:bodyPr wrap="square" lIns="0" tIns="0" rIns="0" bIns="0" anchor="t" rtlCol="0">
+            <a:spAutoFit/>
+          </a:bodyPr>
+          <a:lstStyle/>
+          <a:p>
+            <a:pPr algn="l" marL="0" indent="0">
+              <a:lnSpc>
+                <a:spcPct val="100000"/>
+              </a:lnSpc>
+              <a:spcBef>
+                <a:spcPts val="0"/>
+              </a:spcBef>
+              <a:spcAft>
+                <a:spcPts val="0"/>
+              </a:spcAft>
+              <a:buNone/>
+            </a:pPr>
+            <a:r>
+              <a:rPr lang="en-US" sz="4500" b="1" i="0" u="none" strike="noStrike" dirty="0">
+                <a:solidFill>
+                  <a:srgbClr val="FFFFFF"/>
+                </a:solidFill>
+                <a:latin typeface="Calibri"/>
+                <a:cs typeface="Calibri"/>
+              </a:rPr>
+              <a:t>S</a:t>
+            </a:r>
+            <a:endParaRPr lang="en-US" sz="4500" b="1" i="0" u="none" strike="noStrike" dirty="0">
+              <a:solidFill>
+                <a:srgbClr val="FFFFFF"/>
+              </a:solidFill>
+              <a:latin typeface="Calibri"/>
+              <a:cs typeface="Calibri"/>
+            </a:endParaRPr>
+          </a:p>
+        </p:txBody>
+      </p:sp>
+      <p:sp>
+        <p:nvSpPr>
+          <p:cNvPr id="13" name="TextBox 16"/>
+          <p:cNvSpPr txBox="1"/>
+          <p:nvPr/>
+        </p:nvSpPr>
+        <p:spPr>
+          <a:xfrm>
+            <a:off x="12306300" y="4114800"/>
+            <a:ext cx="2794000" cy="5029200"/>
+          </a:xfrm>
+          <a:prstGeom prst="rect">
+            <a:avLst/>
+          </a:prstGeom>
+          <a:noFill/>
+          <a:ln>
+            <a:noFill/>
+          </a:ln>
+        </p:spPr>
+        <p:txBody>
+          <a:bodyPr wrap="square" lIns="0" tIns="0" rIns="0" bIns="0" anchor="t" rtlCol="0">
+            <a:spAutoFit/>
+          </a:bodyPr>
+          <a:lstStyle/>
+          <a:p>
+            <a:pPr algn="l" marL="0" indent="0">
+              <a:lnSpc>
+                <a:spcPct val="100000"/>
+              </a:lnSpc>
+              <a:spcBef>
+                <a:spcPts val="0"/>
+              </a:spcBef>
+              <a:spcAft>
+                <a:spcPts val="0"/>
+              </a:spcAft>
+              <a:buNone/>
+            </a:pPr>
+            <a:r>
+              <a:rPr lang="en-US" sz="3300" b="1" i="0" u="none" strike="noStrike" dirty="0">
+                <a:solidFill>
+                  <a:srgbClr val="132442"/>
+                </a:solidFill>
+                <a:latin typeface="Calibri"/>
+                <a:cs typeface="Calibri"/>
+              </a:rPr>
+              <a:t>Slides</a:t>
+            </a:r>
+            <a:endParaRPr lang="en-US" sz="3300" b="1" i="0" u="none" strike="noStrike" dirty="0">
+              <a:solidFill>
+                <a:srgbClr val="132442"/>
+              </a:solidFill>
+              <a:latin typeface="Calibri"/>
+              <a:cs typeface="Calibri"/>
+            </a:endParaRPr>
+          </a:p>
+        </p:txBody>
+      </p:sp>
+      <p:sp>
+        <p:nvSpPr>
+          <p:cNvPr id="14" name="TextBox 17"/>
+          <p:cNvSpPr txBox="1"/>
+          <p:nvPr/>
+        </p:nvSpPr>
+        <p:spPr>
+          <a:xfrm>
+            <a:off x="12306300" y="4686300"/>
+            <a:ext cx="2794000" cy="4457700"/>
+          </a:xfrm>
+          <a:prstGeom prst="rect">
+            <a:avLst/>
+          </a:prstGeom>
+          <a:noFill/>
+          <a:ln>
+            <a:noFill/>
+          </a:ln>
+        </p:spPr>
+        <p:txBody>
+          <a:bodyPr wrap="square" lIns="0" tIns="0" rIns="0" bIns="0" anchor="t" rtlCol="0">
+            <a:spAutoFit/>
+          </a:bodyPr>
+          <a:lstStyle/>
+          <a:p>
+            <a:pPr algn="l" marL="0" indent="0">
+              <a:lnSpc>
+                <a:spcPct val="100000"/>
+              </a:lnSpc>
+              <a:spcBef>
+                <a:spcPts val="0"/>
+              </a:spcBef>
+              <a:spcAft>
+                <a:spcPts val="0"/>
+              </a:spcAft>
+              <a:buNone/>
+            </a:pPr>
+            <a:r>
+              <a:rPr lang="en-US" sz="1900" b="0" i="0" u="none" strike="noStrike" dirty="0">
+                <a:solidFill>
+                  <a:srgbClr val="536782"/>
+                </a:solidFill>
+                <a:latin typeface="Calibri"/>
+                <a:cs typeface="Calibri"/>
+              </a:rPr>
+              <a:t>Presentations</a:t>
+            </a:r>
+            <a:endParaRPr lang="en-US" sz="1900" b="0" i="0" u="none" strike="noStrike" dirty="0">
+              <a:solidFill>
+                <a:srgbClr val="536782"/>
+              </a:solidFill>
+              <a:latin typeface="Calibri"/>
+              <a:cs typeface="Calibri"/>
+            </a:endParaRPr>
+          </a:p>
+        </p:txBody>
+      </p:sp>
+      <p:sp>
+        <p:nvSpPr>
+          <p:cNvPr id="15" name="Rounded Rectangle 18"/>
           <p:cNvSpPr/>
           <p:nvPr/>
         </p:nvSpPr>
         <p:spPr>
           <a:xfrm>
-            <a:off x="11353800" y="4927600"/>
-            <a:ext cx="2946400" cy="76200"/>
-          </a:xfrm>
-          <a:prstGeom prst="rect">
+            <a:off x="11049000" y="5562600"/>
+            <a:ext cx="4292600" cy="1447800"/>
+          </a:xfrm>
+          <a:prstGeom prst="roundRect">
             <a:avLst/>
           </a:prstGeom>
           <a:solidFill>
-            <a:srgbClr val="DDE5F5"/>
+            <a:srgbClr val="FFFFFF"/>
           </a:solidFill>
           <a:ln>
             <a:noFill/>
@@ -2747,20 +3034,20 @@
       </p:sp>
       <p:sp>
         <p:nvSpPr>
-          <p:cNvPr id="11" name="Rectangle 14"/>
+          <p:cNvPr id="16" name="Rounded Rectangle 19"/>
           <p:cNvSpPr/>
           <p:nvPr/>
         </p:nvSpPr>
         <p:spPr>
           <a:xfrm>
-            <a:off x="11353800" y="5232400"/>
-            <a:ext cx="2946400" cy="76200"/>
-          </a:xfrm>
-          <a:prstGeom prst="rect">
+            <a:off x="11226800" y="5740400"/>
+            <a:ext cx="838200" cy="1092200"/>
+          </a:xfrm>
+          <a:prstGeom prst="roundRect">
             <a:avLst/>
           </a:prstGeom>
           <a:solidFill>
-            <a:srgbClr val="DDE5F5"/>
+            <a:srgbClr val="13794D"/>
           </a:solidFill>
           <a:ln>
             <a:noFill/>
@@ -2796,63 +3083,14 @@
       </p:sp>
       <p:sp>
         <p:nvSpPr>
-          <p:cNvPr id="12" name="Rectangle 15"/>
-          <p:cNvSpPr/>
-          <p:nvPr/>
-        </p:nvSpPr>
-        <p:spPr>
-          <a:xfrm>
-            <a:off x="11353800" y="5537200"/>
-            <a:ext cx="2476500" cy="76200"/>
-          </a:xfrm>
-          <a:prstGeom prst="rect">
-            <a:avLst/>
-          </a:prstGeom>
-          <a:solidFill>
-            <a:srgbClr val="DDE5F5"/>
-          </a:solidFill>
-          <a:ln>
-            <a:noFill/>
-          </a:ln>
-        </p:spPr>
-        <p:txBody>
-          <a:bodyPr wrap="square" lIns="91440" tIns="45720" rIns="91440" bIns="45720" anchor="ctr" rtlCol="0">
-            <a:noAutofit/>
-          </a:bodyPr>
-          <a:lstStyle/>
-          <a:p>
-            <a:pPr algn="ctr" marL="0" indent="0">
-              <a:lnSpc>
-                <a:spcPct val="100000"/>
-              </a:lnSpc>
-              <a:spcBef>
-                <a:spcPts val="0"/>
-              </a:spcBef>
-              <a:spcAft>
-                <a:spcPts val="0"/>
-              </a:spcAft>
-              <a:buNone/>
-            </a:pPr>
-            <a:endParaRPr lang="en-US" sz="1800" b="0" i="0" u="none" strike="noStrike" dirty="0">
-              <a:solidFill>
-                <a:srgbClr val="FFFFFF"/>
-              </a:solidFill>
-              <a:latin typeface="Calibri"/>
-              <a:cs typeface="Calibri"/>
-            </a:endParaRPr>
-          </a:p>
-        </p:txBody>
-      </p:sp>
-      <p:sp>
-        <p:nvSpPr>
-          <p:cNvPr id="13" name="TextBox 16"/>
+          <p:cNvPr id="17" name="TextBox 20"/>
           <p:cNvSpPr txBox="1"/>
           <p:nvPr/>
         </p:nvSpPr>
         <p:spPr>
           <a:xfrm>
-            <a:off x="914400" y="7924800"/>
-            <a:ext cx="8128000" cy="1219200"/>
+            <a:off x="11417300" y="5918200"/>
+            <a:ext cx="711200" cy="3225800"/>
           </a:xfrm>
           <a:prstGeom prst="rect">
             <a:avLst/>
@@ -2881,6 +3119,177 @@
               <a:buNone/>
             </a:pPr>
             <a:r>
+              <a:rPr lang="en-US" sz="4500" b="1" i="0" u="none" strike="noStrike" dirty="0">
+                <a:solidFill>
+                  <a:srgbClr val="FFFFFF"/>
+                </a:solidFill>
+                <a:latin typeface="Calibri"/>
+                <a:cs typeface="Calibri"/>
+              </a:rPr>
+              <a:t>#</a:t>
+            </a:r>
+            <a:endParaRPr lang="en-US" sz="4500" b="1" i="0" u="none" strike="noStrike" dirty="0">
+              <a:solidFill>
+                <a:srgbClr val="FFFFFF"/>
+              </a:solidFill>
+              <a:latin typeface="Calibri"/>
+              <a:cs typeface="Calibri"/>
+            </a:endParaRPr>
+          </a:p>
+        </p:txBody>
+      </p:sp>
+      <p:sp>
+        <p:nvSpPr>
+          <p:cNvPr id="18" name="TextBox 21"/>
+          <p:cNvSpPr txBox="1"/>
+          <p:nvPr/>
+        </p:nvSpPr>
+        <p:spPr>
+          <a:xfrm>
+            <a:off x="12306300" y="5854700"/>
+            <a:ext cx="2794000" cy="3289300"/>
+          </a:xfrm>
+          <a:prstGeom prst="rect">
+            <a:avLst/>
+          </a:prstGeom>
+          <a:noFill/>
+          <a:ln>
+            <a:noFill/>
+          </a:ln>
+        </p:spPr>
+        <p:txBody>
+          <a:bodyPr wrap="square" lIns="0" tIns="0" rIns="0" bIns="0" anchor="t" rtlCol="0">
+            <a:spAutoFit/>
+          </a:bodyPr>
+          <a:lstStyle/>
+          <a:p>
+            <a:pPr algn="l" marL="0" indent="0">
+              <a:lnSpc>
+                <a:spcPct val="100000"/>
+              </a:lnSpc>
+              <a:spcBef>
+                <a:spcPts val="0"/>
+              </a:spcBef>
+              <a:spcAft>
+                <a:spcPts val="0"/>
+              </a:spcAft>
+              <a:buNone/>
+            </a:pPr>
+            <a:r>
+              <a:rPr lang="en-US" sz="3300" b="1" i="0" u="none" strike="noStrike" dirty="0">
+                <a:solidFill>
+                  <a:srgbClr val="132442"/>
+                </a:solidFill>
+                <a:latin typeface="Calibri"/>
+                <a:cs typeface="Calibri"/>
+              </a:rPr>
+              <a:t>Sheets</a:t>
+            </a:r>
+            <a:endParaRPr lang="en-US" sz="3300" b="1" i="0" u="none" strike="noStrike" dirty="0">
+              <a:solidFill>
+                <a:srgbClr val="132442"/>
+              </a:solidFill>
+              <a:latin typeface="Calibri"/>
+              <a:cs typeface="Calibri"/>
+            </a:endParaRPr>
+          </a:p>
+        </p:txBody>
+      </p:sp>
+      <p:sp>
+        <p:nvSpPr>
+          <p:cNvPr id="19" name="TextBox 22"/>
+          <p:cNvSpPr txBox="1"/>
+          <p:nvPr/>
+        </p:nvSpPr>
+        <p:spPr>
+          <a:xfrm>
+            <a:off x="12306300" y="6426200"/>
+            <a:ext cx="2794000" cy="2717800"/>
+          </a:xfrm>
+          <a:prstGeom prst="rect">
+            <a:avLst/>
+          </a:prstGeom>
+          <a:noFill/>
+          <a:ln>
+            <a:noFill/>
+          </a:ln>
+        </p:spPr>
+        <p:txBody>
+          <a:bodyPr wrap="square" lIns="0" tIns="0" rIns="0" bIns="0" anchor="t" rtlCol="0">
+            <a:spAutoFit/>
+          </a:bodyPr>
+          <a:lstStyle/>
+          <a:p>
+            <a:pPr algn="l" marL="0" indent="0">
+              <a:lnSpc>
+                <a:spcPct val="100000"/>
+              </a:lnSpc>
+              <a:spcBef>
+                <a:spcPts val="0"/>
+              </a:spcBef>
+              <a:spcAft>
+                <a:spcPts val="0"/>
+              </a:spcAft>
+              <a:buNone/>
+            </a:pPr>
+            <a:r>
+              <a:rPr lang="en-US" sz="1900" b="0" i="0" u="none" strike="noStrike" dirty="0">
+                <a:solidFill>
+                  <a:srgbClr val="536782"/>
+                </a:solidFill>
+                <a:latin typeface="Calibri"/>
+                <a:cs typeface="Calibri"/>
+              </a:rPr>
+              <a:t>Spreadsheets</a:t>
+            </a:r>
+            <a:endParaRPr lang="en-US" sz="1900" b="0" i="0" u="none" strike="noStrike" dirty="0">
+              <a:solidFill>
+                <a:srgbClr val="536782"/>
+              </a:solidFill>
+              <a:latin typeface="Calibri"/>
+              <a:cs typeface="Calibri"/>
+            </a:endParaRPr>
+          </a:p>
+        </p:txBody>
+      </p:sp>
+      <p:sp>
+        <p:nvSpPr>
+          <p:cNvPr id="20" name="TextBox 23"/>
+          <p:cNvSpPr txBox="1"/>
+          <p:nvPr/>
+        </p:nvSpPr>
+        <p:spPr>
+          <a:xfrm>
+            <a:off x="914400" y="7924800"/>
+            <a:ext cx="14427200" cy="1219200"/>
+          </a:xfrm>
+          <a:prstGeom prst="rect">
+            <a:avLst/>
+          </a:prstGeom>
+          <a:noFill/>
+          <a:ln>
+            <a:noFill/>
+          </a:ln>
+        </p:spPr>
+        <p:txBody>
+          <a:bodyPr wrap="square" lIns="0" tIns="0" rIns="0" bIns="0" anchor="t" rtlCol="0">
+            <a:spAutoFit/>
+          </a:bodyPr>
+          <a:lstStyle/>
+          <a:p>
+            <a:pPr algn="l" marL="0" indent="0">
+              <a:lnSpc>
+                <a:spcPct val="100000"/>
+              </a:lnSpc>
+              <a:spcBef>
+                <a:spcPts val="0"/>
+              </a:spcBef>
+              <a:spcAft>
+                <a:spcPts val="0"/>
+              </a:spcAft>
+              <a:buNone/>
+            </a:pPr>
+            <a:r>
               <a:rPr lang="en-US" sz="1800" b="1" i="0" u="none" strike="noStrike" dirty="0">
                 <a:solidFill>
                   <a:srgbClr val="FFFFFF"/>
@@ -2888,7 +3297,7 @@
                 <a:latin typeface="Calibri"/>
                 <a:cs typeface="Calibri"/>
               </a:rPr>
-              <a:t>WRITER IS LIVE</a:t>
+              <a:t>THREE APPS. ONE OPEN SOURCE SUITE.</a:t>
             </a:r>
             <a:endParaRPr lang="en-US" sz="1800" b="1" i="0" u="none" strike="noStrike" dirty="0">
               <a:solidFill>
@@ -2938,7 +3347,7 @@
       </p:grpSpPr>
       <p:sp>
         <p:nvSpPr>
-          <p:cNvPr id="2" name="TextBox 18"/>
+          <p:cNvPr id="2" name="TextBox 25"/>
           <p:cNvSpPr txBox="1"/>
           <p:nvPr/>
         </p:nvSpPr>
@@ -2995,7 +3404,7 @@
       </p:sp>
       <p:sp>
         <p:nvSpPr>
-          <p:cNvPr id="3" name="TextBox 19"/>
+          <p:cNvPr id="3" name="TextBox 26"/>
           <p:cNvSpPr txBox="1"/>
           <p:nvPr/>
         </p:nvSpPr>
@@ -3083,7 +3492,7 @@
       </p:sp>
       <p:sp>
         <p:nvSpPr>
-          <p:cNvPr id="4" name="TextBox 20"/>
+          <p:cNvPr id="4" name="TextBox 27"/>
           <p:cNvSpPr txBox="1"/>
           <p:nvPr/>
         </p:nvSpPr>
@@ -3171,7 +3580,7 @@
       </p:sp>
       <p:pic>
         <p:nvPicPr>
-          <p:cNvPr id="5" name="Picture 21"/>
+          <p:cNvPr id="5" name="Picture 28"/>
           <p:cNvPicPr>
             <a:picLocks noChangeAspect="1"/>
           </p:cNvPicPr>
@@ -3195,7 +3604,7 @@
       </p:pic>
       <p:sp>
         <p:nvSpPr>
-          <p:cNvPr id="6" name="TextBox 22"/>
+          <p:cNvPr id="6" name="TextBox 29"/>
           <p:cNvSpPr txBox="1"/>
           <p:nvPr/>
         </p:nvSpPr>
@@ -3252,7 +3661,7 @@
       </p:sp>
       <p:sp>
         <p:nvSpPr>
-          <p:cNvPr id="7" name="TextBox 23"/>
+          <p:cNvPr id="7" name="TextBox 30"/>
           <p:cNvSpPr txBox="1"/>
           <p:nvPr/>
         </p:nvSpPr>
@@ -3350,6 +3759,2570 @@
 </file>
 
 <file path=ppt/slides/slide3.xml><?xml version="1.0" encoding="utf-8"?>
+<p:sld xmlns:a="http://schemas.openxmlformats.org/drawingml/2006/main" xmlns:r="http://schemas.openxmlformats.org/officeDocument/2006/relationships" xmlns:p="http://schemas.openxmlformats.org/presentationml/2006/main">
+  <p:cSld>
+    <p:bg>
+      <p:bgPr>
+        <a:solidFill>
+          <a:srgbClr val="FFF3ED"/>
+        </a:solidFill>
+        <a:effectLst/>
+      </p:bgPr>
+    </p:bg>
+    <p:spTree>
+      <p:nvGrpSpPr>
+        <p:cNvPr id="1" name=""/>
+        <p:cNvGrpSpPr/>
+        <p:nvPr/>
+      </p:nvGrpSpPr>
+      <p:grpSpPr>
+        <a:xfrm>
+          <a:off x="0" y="0"/>
+          <a:ext cx="0" cy="0"/>
+          <a:chOff x="0" y="0"/>
+          <a:chExt cx="0" cy="0"/>
+        </a:xfrm>
+      </p:grpSpPr>
+      <p:sp>
+        <p:nvSpPr>
+          <p:cNvPr id="2" name="TextBox 32"/>
+          <p:cNvSpPr txBox="1"/>
+          <p:nvPr/>
+        </p:nvSpPr>
+        <p:spPr>
+          <a:xfrm>
+            <a:off x="914400" y="508000"/>
+            <a:ext cx="14427200" cy="8636000"/>
+          </a:xfrm>
+          <a:prstGeom prst="rect">
+            <a:avLst/>
+          </a:prstGeom>
+          <a:noFill/>
+          <a:ln>
+            <a:noFill/>
+          </a:ln>
+        </p:spPr>
+        <p:txBody>
+          <a:bodyPr wrap="square" lIns="0" tIns="0" rIns="0" bIns="0" anchor="t" rtlCol="0">
+            <a:spAutoFit/>
+          </a:bodyPr>
+          <a:lstStyle/>
+          <a:p>
+            <a:pPr algn="l" marL="0" indent="0">
+              <a:lnSpc>
+                <a:spcPct val="100000"/>
+              </a:lnSpc>
+              <a:spcBef>
+                <a:spcPts val="0"/>
+              </a:spcBef>
+              <a:spcAft>
+                <a:spcPts val="0"/>
+              </a:spcAft>
+              <a:buNone/>
+            </a:pPr>
+            <a:r>
+              <a:rPr lang="en-US" sz="1600" b="1" i="0" u="none" strike="noStrike" dirty="0">
+                <a:solidFill>
+                  <a:srgbClr val="C74724"/>
+                </a:solidFill>
+                <a:latin typeface="Calibri"/>
+                <a:cs typeface="Calibri"/>
+              </a:rPr>
+              <a:t>02  /  MEET SLIDES</a:t>
+            </a:r>
+            <a:endParaRPr lang="en-US" sz="1600" b="1" i="0" u="none" strike="noStrike" dirty="0">
+              <a:solidFill>
+                <a:srgbClr val="C74724"/>
+              </a:solidFill>
+              <a:latin typeface="Calibri"/>
+              <a:cs typeface="Calibri"/>
+            </a:endParaRPr>
+          </a:p>
+        </p:txBody>
+      </p:sp>
+      <p:sp>
+        <p:nvSpPr>
+          <p:cNvPr id="3" name="TextBox 33"/>
+          <p:cNvSpPr txBox="1"/>
+          <p:nvPr/>
+        </p:nvSpPr>
+        <p:spPr>
+          <a:xfrm>
+            <a:off x="914400" y="1600200"/>
+            <a:ext cx="7874000" cy="7543800"/>
+          </a:xfrm>
+          <a:prstGeom prst="rect">
+            <a:avLst/>
+          </a:prstGeom>
+          <a:noFill/>
+          <a:ln>
+            <a:noFill/>
+          </a:ln>
+        </p:spPr>
+        <p:txBody>
+          <a:bodyPr wrap="square" lIns="0" tIns="0" rIns="0" bIns="0" anchor="t" rtlCol="0">
+            <a:spAutoFit/>
+          </a:bodyPr>
+          <a:lstStyle/>
+          <a:p>
+            <a:pPr algn="l" marL="0" indent="0">
+              <a:lnSpc>
+                <a:spcPct val="100000"/>
+              </a:lnSpc>
+              <a:spcBef>
+                <a:spcPts val="0"/>
+              </a:spcBef>
+              <a:spcAft>
+                <a:spcPts val="0"/>
+              </a:spcAft>
+              <a:buNone/>
+            </a:pPr>
+            <a:r>
+              <a:rPr lang="en-US" sz="8800" b="1" i="0" u="none" strike="noStrike" dirty="0">
+                <a:solidFill>
+                  <a:srgbClr val="132442"/>
+                </a:solidFill>
+                <a:latin typeface="Calibri"/>
+                <a:cs typeface="Calibri"/>
+              </a:rPr>
+              <a:t>Make your</a:t>
+            </a:r>
+            <a:endParaRPr lang="en-US" sz="8800" b="1" i="0" u="none" strike="noStrike" dirty="0">
+              <a:solidFill>
+                <a:srgbClr val="132442"/>
+              </a:solidFill>
+              <a:latin typeface="Calibri"/>
+              <a:cs typeface="Calibri"/>
+            </a:endParaRPr>
+          </a:p>
+          <a:p>
+            <a:pPr algn="l" marL="0" indent="0">
+              <a:lnSpc>
+                <a:spcPct val="100000"/>
+              </a:lnSpc>
+              <a:spcBef>
+                <a:spcPts val="0"/>
+              </a:spcBef>
+              <a:spcAft>
+                <a:spcPts val="0"/>
+              </a:spcAft>
+              <a:buNone/>
+            </a:pPr>
+            <a:r>
+              <a:rPr lang="en-US" sz="8800" b="1" i="0" u="none" strike="noStrike" dirty="0">
+                <a:solidFill>
+                  <a:srgbClr val="132442"/>
+                </a:solidFill>
+                <a:latin typeface="Calibri"/>
+                <a:cs typeface="Calibri"/>
+              </a:rPr>
+              <a:t>point.</a:t>
+            </a:r>
+            <a:endParaRPr lang="en-US" sz="8800" b="1" i="0" u="none" strike="noStrike" dirty="0">
+              <a:solidFill>
+                <a:srgbClr val="132442"/>
+              </a:solidFill>
+              <a:latin typeface="Calibri"/>
+              <a:cs typeface="Calibri"/>
+            </a:endParaRPr>
+          </a:p>
+        </p:txBody>
+      </p:sp>
+      <p:sp>
+        <p:nvSpPr>
+          <p:cNvPr id="4" name="TextBox 34"/>
+          <p:cNvSpPr txBox="1"/>
+          <p:nvPr/>
+        </p:nvSpPr>
+        <p:spPr>
+          <a:xfrm>
+            <a:off x="914400" y="4343400"/>
+            <a:ext cx="6159500" cy="4800600"/>
+          </a:xfrm>
+          <a:prstGeom prst="rect">
+            <a:avLst/>
+          </a:prstGeom>
+          <a:noFill/>
+          <a:ln>
+            <a:noFill/>
+          </a:ln>
+        </p:spPr>
+        <p:txBody>
+          <a:bodyPr wrap="square" lIns="0" tIns="0" rIns="0" bIns="0" anchor="t" rtlCol="0">
+            <a:spAutoFit/>
+          </a:bodyPr>
+          <a:lstStyle/>
+          <a:p>
+            <a:pPr algn="l" marL="0" indent="0">
+              <a:lnSpc>
+                <a:spcPct val="100000"/>
+              </a:lnSpc>
+              <a:spcBef>
+                <a:spcPts val="0"/>
+              </a:spcBef>
+              <a:spcAft>
+                <a:spcPts val="0"/>
+              </a:spcAft>
+              <a:buNone/>
+            </a:pPr>
+            <a:r>
+              <a:rPr lang="en-US" sz="2700" b="0" i="0" u="none" strike="noStrike" dirty="0">
+                <a:solidFill>
+                  <a:srgbClr val="536782"/>
+                </a:solidFill>
+                <a:latin typeface="Calibri"/>
+                <a:cs typeface="Calibri"/>
+              </a:rPr>
+              <a:t>Build a deck. Tell your story.</a:t>
+            </a:r>
+            <a:endParaRPr lang="en-US" sz="2700" b="0" i="0" u="none" strike="noStrike" dirty="0">
+              <a:solidFill>
+                <a:srgbClr val="536782"/>
+              </a:solidFill>
+              <a:latin typeface="Calibri"/>
+              <a:cs typeface="Calibri"/>
+            </a:endParaRPr>
+          </a:p>
+          <a:p>
+            <a:pPr algn="l" marL="0" indent="0">
+              <a:lnSpc>
+                <a:spcPct val="100000"/>
+              </a:lnSpc>
+              <a:spcBef>
+                <a:spcPts val="0"/>
+              </a:spcBef>
+              <a:spcAft>
+                <a:spcPts val="0"/>
+              </a:spcAft>
+              <a:buNone/>
+            </a:pPr>
+            <a:r>
+              <a:rPr lang="en-US" sz="2700" b="0" i="0" u="none" strike="noStrike" dirty="0">
+                <a:solidFill>
+                  <a:srgbClr val="536782"/>
+                </a:solidFill>
+                <a:latin typeface="Calibri"/>
+                <a:cs typeface="Calibri"/>
+              </a:rPr>
+              <a:t>Present it with confidence.</a:t>
+            </a:r>
+            <a:endParaRPr lang="en-US" sz="2700" b="0" i="0" u="none" strike="noStrike" dirty="0">
+              <a:solidFill>
+                <a:srgbClr val="536782"/>
+              </a:solidFill>
+              <a:latin typeface="Calibri"/>
+              <a:cs typeface="Calibri"/>
+            </a:endParaRPr>
+          </a:p>
+        </p:txBody>
+      </p:sp>
+      <p:sp>
+        <p:nvSpPr>
+          <p:cNvPr id="5" name="Rounded Rectangle 35"/>
+          <p:cNvSpPr/>
+          <p:nvPr/>
+        </p:nvSpPr>
+        <p:spPr>
+          <a:xfrm>
+            <a:off x="8382000" y="2286000"/>
+            <a:ext cx="6959600" cy="4445000"/>
+          </a:xfrm>
+          <a:prstGeom prst="roundRect">
+            <a:avLst/>
+          </a:prstGeom>
+          <a:solidFill>
+            <a:srgbClr val="FFFFFF"/>
+          </a:solidFill>
+          <a:ln>
+            <a:noFill/>
+          </a:ln>
+        </p:spPr>
+        <p:txBody>
+          <a:bodyPr wrap="square" lIns="91440" tIns="45720" rIns="91440" bIns="45720" anchor="ctr" rtlCol="0">
+            <a:noAutofit/>
+          </a:bodyPr>
+          <a:lstStyle/>
+          <a:p>
+            <a:pPr algn="ctr" marL="0" indent="0">
+              <a:lnSpc>
+                <a:spcPct val="100000"/>
+              </a:lnSpc>
+              <a:spcBef>
+                <a:spcPts val="0"/>
+              </a:spcBef>
+              <a:spcAft>
+                <a:spcPts val="0"/>
+              </a:spcAft>
+              <a:buNone/>
+            </a:pPr>
+            <a:endParaRPr lang="en-US" sz="1800" b="0" i="0" u="none" strike="noStrike" dirty="0">
+              <a:solidFill>
+                <a:srgbClr val="FFFFFF"/>
+              </a:solidFill>
+              <a:latin typeface="Calibri"/>
+              <a:cs typeface="Calibri"/>
+            </a:endParaRPr>
+          </a:p>
+        </p:txBody>
+      </p:sp>
+      <p:sp>
+        <p:nvSpPr>
+          <p:cNvPr id="6" name="TextBox 36"/>
+          <p:cNvSpPr txBox="1"/>
+          <p:nvPr/>
+        </p:nvSpPr>
+        <p:spPr>
+          <a:xfrm>
+            <a:off x="8826500" y="2628900"/>
+            <a:ext cx="6032500" cy="6515100"/>
+          </a:xfrm>
+          <a:prstGeom prst="rect">
+            <a:avLst/>
+          </a:prstGeom>
+          <a:noFill/>
+          <a:ln>
+            <a:noFill/>
+          </a:ln>
+        </p:spPr>
+        <p:txBody>
+          <a:bodyPr wrap="square" lIns="0" tIns="0" rIns="0" bIns="0" anchor="t" rtlCol="0">
+            <a:spAutoFit/>
+          </a:bodyPr>
+          <a:lstStyle/>
+          <a:p>
+            <a:pPr algn="l" marL="0" indent="0">
+              <a:lnSpc>
+                <a:spcPct val="100000"/>
+              </a:lnSpc>
+              <a:spcBef>
+                <a:spcPts val="0"/>
+              </a:spcBef>
+              <a:spcAft>
+                <a:spcPts val="0"/>
+              </a:spcAft>
+              <a:buNone/>
+            </a:pPr>
+            <a:r>
+              <a:rPr lang="en-US" sz="4200" b="1" i="0" u="none" strike="noStrike" dirty="0">
+                <a:solidFill>
+                  <a:srgbClr val="132442"/>
+                </a:solidFill>
+                <a:latin typeface="Calibri"/>
+                <a:cs typeface="Calibri"/>
+              </a:rPr>
+              <a:t>A clear idea.</a:t>
+            </a:r>
+            <a:endParaRPr lang="en-US" sz="4200" b="1" i="0" u="none" strike="noStrike" dirty="0">
+              <a:solidFill>
+                <a:srgbClr val="132442"/>
+              </a:solidFill>
+              <a:latin typeface="Calibri"/>
+              <a:cs typeface="Calibri"/>
+            </a:endParaRPr>
+          </a:p>
+        </p:txBody>
+      </p:sp>
+      <p:sp>
+        <p:nvSpPr>
+          <p:cNvPr id="7" name="TextBox 37"/>
+          <p:cNvSpPr txBox="1"/>
+          <p:nvPr/>
+        </p:nvSpPr>
+        <p:spPr>
+          <a:xfrm>
+            <a:off x="8826500" y="3441700"/>
+            <a:ext cx="6032500" cy="5702300"/>
+          </a:xfrm>
+          <a:prstGeom prst="rect">
+            <a:avLst/>
+          </a:prstGeom>
+          <a:noFill/>
+          <a:ln>
+            <a:noFill/>
+          </a:ln>
+        </p:spPr>
+        <p:txBody>
+          <a:bodyPr wrap="square" lIns="0" tIns="0" rIns="0" bIns="0" anchor="t" rtlCol="0">
+            <a:spAutoFit/>
+          </a:bodyPr>
+          <a:lstStyle/>
+          <a:p>
+            <a:pPr algn="l" marL="0" indent="0">
+              <a:lnSpc>
+                <a:spcPct val="100000"/>
+              </a:lnSpc>
+              <a:spcBef>
+                <a:spcPts val="0"/>
+              </a:spcBef>
+              <a:spcAft>
+                <a:spcPts val="0"/>
+              </a:spcAft>
+              <a:buNone/>
+            </a:pPr>
+            <a:r>
+              <a:rPr lang="en-US" sz="1500" b="1" i="0" u="none" strike="noStrike" dirty="0">
+                <a:solidFill>
+                  <a:srgbClr val="C74724"/>
+                </a:solidFill>
+                <a:latin typeface="Calibri"/>
+                <a:cs typeface="Calibri"/>
+              </a:rPr>
+              <a:t>MAKE EVERY SLIDE COUNT</a:t>
+            </a:r>
+            <a:endParaRPr lang="en-US" sz="1500" b="1" i="0" u="none" strike="noStrike" dirty="0">
+              <a:solidFill>
+                <a:srgbClr val="C74724"/>
+              </a:solidFill>
+              <a:latin typeface="Calibri"/>
+              <a:cs typeface="Calibri"/>
+            </a:endParaRPr>
+          </a:p>
+        </p:txBody>
+      </p:sp>
+      <p:sp>
+        <p:nvSpPr>
+          <p:cNvPr id="8" name="Rounded Rectangle 38"/>
+          <p:cNvSpPr/>
+          <p:nvPr/>
+        </p:nvSpPr>
+        <p:spPr>
+          <a:xfrm>
+            <a:off x="8915400" y="5130800"/>
+            <a:ext cx="787400" cy="889000"/>
+          </a:xfrm>
+          <a:prstGeom prst="roundRect">
+            <a:avLst/>
+          </a:prstGeom>
+          <a:solidFill>
+            <a:srgbClr val="FFCBB8"/>
+          </a:solidFill>
+          <a:ln>
+            <a:noFill/>
+          </a:ln>
+        </p:spPr>
+        <p:txBody>
+          <a:bodyPr wrap="square" lIns="91440" tIns="45720" rIns="91440" bIns="45720" anchor="ctr" rtlCol="0">
+            <a:noAutofit/>
+          </a:bodyPr>
+          <a:lstStyle/>
+          <a:p>
+            <a:pPr algn="ctr" marL="0" indent="0">
+              <a:lnSpc>
+                <a:spcPct val="100000"/>
+              </a:lnSpc>
+              <a:spcBef>
+                <a:spcPts val="0"/>
+              </a:spcBef>
+              <a:spcAft>
+                <a:spcPts val="0"/>
+              </a:spcAft>
+              <a:buNone/>
+            </a:pPr>
+            <a:endParaRPr lang="en-US" sz="1800" b="0" i="0" u="none" strike="noStrike" dirty="0">
+              <a:solidFill>
+                <a:srgbClr val="FFFFFF"/>
+              </a:solidFill>
+              <a:latin typeface="Calibri"/>
+              <a:cs typeface="Calibri"/>
+            </a:endParaRPr>
+          </a:p>
+        </p:txBody>
+      </p:sp>
+      <p:sp>
+        <p:nvSpPr>
+          <p:cNvPr id="9" name="Rounded Rectangle 39"/>
+          <p:cNvSpPr/>
+          <p:nvPr/>
+        </p:nvSpPr>
+        <p:spPr>
+          <a:xfrm>
+            <a:off x="10083800" y="4584700"/>
+            <a:ext cx="787400" cy="1435100"/>
+          </a:xfrm>
+          <a:prstGeom prst="roundRect">
+            <a:avLst/>
+          </a:prstGeom>
+          <a:solidFill>
+            <a:srgbClr val="F2906D"/>
+          </a:solidFill>
+          <a:ln>
+            <a:noFill/>
+          </a:ln>
+        </p:spPr>
+        <p:txBody>
+          <a:bodyPr wrap="square" lIns="91440" tIns="45720" rIns="91440" bIns="45720" anchor="ctr" rtlCol="0">
+            <a:noAutofit/>
+          </a:bodyPr>
+          <a:lstStyle/>
+          <a:p>
+            <a:pPr algn="ctr" marL="0" indent="0">
+              <a:lnSpc>
+                <a:spcPct val="100000"/>
+              </a:lnSpc>
+              <a:spcBef>
+                <a:spcPts val="0"/>
+              </a:spcBef>
+              <a:spcAft>
+                <a:spcPts val="0"/>
+              </a:spcAft>
+              <a:buNone/>
+            </a:pPr>
+            <a:endParaRPr lang="en-US" sz="1800" b="0" i="0" u="none" strike="noStrike" dirty="0">
+              <a:solidFill>
+                <a:srgbClr val="FFFFFF"/>
+              </a:solidFill>
+              <a:latin typeface="Calibri"/>
+              <a:cs typeface="Calibri"/>
+            </a:endParaRPr>
+          </a:p>
+        </p:txBody>
+      </p:sp>
+      <p:sp>
+        <p:nvSpPr>
+          <p:cNvPr id="10" name="Rounded Rectangle 40"/>
+          <p:cNvSpPr/>
+          <p:nvPr/>
+        </p:nvSpPr>
+        <p:spPr>
+          <a:xfrm>
+            <a:off x="11252200" y="3937000"/>
+            <a:ext cx="787400" cy="2082800"/>
+          </a:xfrm>
+          <a:prstGeom prst="roundRect">
+            <a:avLst/>
+          </a:prstGeom>
+          <a:solidFill>
+            <a:srgbClr val="C74724"/>
+          </a:solidFill>
+          <a:ln>
+            <a:noFill/>
+          </a:ln>
+        </p:spPr>
+        <p:txBody>
+          <a:bodyPr wrap="square" lIns="91440" tIns="45720" rIns="91440" bIns="45720" anchor="ctr" rtlCol="0">
+            <a:noAutofit/>
+          </a:bodyPr>
+          <a:lstStyle/>
+          <a:p>
+            <a:pPr algn="ctr" marL="0" indent="0">
+              <a:lnSpc>
+                <a:spcPct val="100000"/>
+              </a:lnSpc>
+              <a:spcBef>
+                <a:spcPts val="0"/>
+              </a:spcBef>
+              <a:spcAft>
+                <a:spcPts val="0"/>
+              </a:spcAft>
+              <a:buNone/>
+            </a:pPr>
+            <a:endParaRPr lang="en-US" sz="1800" b="0" i="0" u="none" strike="noStrike" dirty="0">
+              <a:solidFill>
+                <a:srgbClr val="FFFFFF"/>
+              </a:solidFill>
+              <a:latin typeface="Calibri"/>
+              <a:cs typeface="Calibri"/>
+            </a:endParaRPr>
+          </a:p>
+        </p:txBody>
+      </p:sp>
+      <p:sp>
+        <p:nvSpPr>
+          <p:cNvPr id="11" name="TextBox 41"/>
+          <p:cNvSpPr txBox="1"/>
+          <p:nvPr/>
+        </p:nvSpPr>
+        <p:spPr>
+          <a:xfrm>
+            <a:off x="12750800" y="4445000"/>
+            <a:ext cx="2349500" cy="4699000"/>
+          </a:xfrm>
+          <a:prstGeom prst="rect">
+            <a:avLst/>
+          </a:prstGeom>
+          <a:noFill/>
+          <a:ln>
+            <a:noFill/>
+          </a:ln>
+        </p:spPr>
+        <p:txBody>
+          <a:bodyPr wrap="square" lIns="0" tIns="0" rIns="0" bIns="0" anchor="t" rtlCol="0">
+            <a:spAutoFit/>
+          </a:bodyPr>
+          <a:lstStyle/>
+          <a:p>
+            <a:pPr algn="l" marL="0" indent="0">
+              <a:lnSpc>
+                <a:spcPct val="100000"/>
+              </a:lnSpc>
+              <a:spcBef>
+                <a:spcPts val="0"/>
+              </a:spcBef>
+              <a:spcAft>
+                <a:spcPts val="0"/>
+              </a:spcAft>
+              <a:buNone/>
+            </a:pPr>
+            <a:r>
+              <a:rPr lang="en-US" sz="1800" b="1" i="0" u="none" strike="noStrike" dirty="0">
+                <a:solidFill>
+                  <a:srgbClr val="536782"/>
+                </a:solidFill>
+                <a:latin typeface="Calibri"/>
+                <a:cs typeface="Calibri"/>
+              </a:rPr>
+              <a:t>Clear message</a:t>
+            </a:r>
+            <a:endParaRPr lang="en-US" sz="1800" b="1" i="0" u="none" strike="noStrike" dirty="0">
+              <a:solidFill>
+                <a:srgbClr val="536782"/>
+              </a:solidFill>
+              <a:latin typeface="Calibri"/>
+              <a:cs typeface="Calibri"/>
+            </a:endParaRPr>
+          </a:p>
+        </p:txBody>
+      </p:sp>
+      <p:sp>
+        <p:nvSpPr>
+          <p:cNvPr id="12" name="TextBox 42"/>
+          <p:cNvSpPr txBox="1"/>
+          <p:nvPr/>
+        </p:nvSpPr>
+        <p:spPr>
+          <a:xfrm>
+            <a:off x="12750800" y="4991100"/>
+            <a:ext cx="2349500" cy="4152900"/>
+          </a:xfrm>
+          <a:prstGeom prst="rect">
+            <a:avLst/>
+          </a:prstGeom>
+          <a:noFill/>
+          <a:ln>
+            <a:noFill/>
+          </a:ln>
+        </p:spPr>
+        <p:txBody>
+          <a:bodyPr wrap="square" lIns="0" tIns="0" rIns="0" bIns="0" anchor="t" rtlCol="0">
+            <a:spAutoFit/>
+          </a:bodyPr>
+          <a:lstStyle/>
+          <a:p>
+            <a:pPr algn="l" marL="0" indent="0">
+              <a:lnSpc>
+                <a:spcPct val="100000"/>
+              </a:lnSpc>
+              <a:spcBef>
+                <a:spcPts val="0"/>
+              </a:spcBef>
+              <a:spcAft>
+                <a:spcPts val="0"/>
+              </a:spcAft>
+              <a:buNone/>
+            </a:pPr>
+            <a:r>
+              <a:rPr lang="en-US" sz="1800" b="0" i="0" u="none" strike="noStrike" dirty="0">
+                <a:solidFill>
+                  <a:srgbClr val="536782"/>
+                </a:solidFill>
+                <a:latin typeface="Calibri"/>
+                <a:cs typeface="Calibri"/>
+              </a:rPr>
+              <a:t>Strong visuals</a:t>
+            </a:r>
+            <a:endParaRPr lang="en-US" sz="1800" b="0" i="0" u="none" strike="noStrike" dirty="0">
+              <a:solidFill>
+                <a:srgbClr val="536782"/>
+              </a:solidFill>
+              <a:latin typeface="Calibri"/>
+              <a:cs typeface="Calibri"/>
+            </a:endParaRPr>
+          </a:p>
+        </p:txBody>
+      </p:sp>
+      <p:sp>
+        <p:nvSpPr>
+          <p:cNvPr id="13" name="TextBox 43"/>
+          <p:cNvSpPr txBox="1"/>
+          <p:nvPr/>
+        </p:nvSpPr>
+        <p:spPr>
+          <a:xfrm>
+            <a:off x="12750800" y="5537200"/>
+            <a:ext cx="2349500" cy="3606800"/>
+          </a:xfrm>
+          <a:prstGeom prst="rect">
+            <a:avLst/>
+          </a:prstGeom>
+          <a:noFill/>
+          <a:ln>
+            <a:noFill/>
+          </a:ln>
+        </p:spPr>
+        <p:txBody>
+          <a:bodyPr wrap="square" lIns="0" tIns="0" rIns="0" bIns="0" anchor="t" rtlCol="0">
+            <a:spAutoFit/>
+          </a:bodyPr>
+          <a:lstStyle/>
+          <a:p>
+            <a:pPr algn="l" marL="0" indent="0">
+              <a:lnSpc>
+                <a:spcPct val="100000"/>
+              </a:lnSpc>
+              <a:spcBef>
+                <a:spcPts val="0"/>
+              </a:spcBef>
+              <a:spcAft>
+                <a:spcPts val="0"/>
+              </a:spcAft>
+              <a:buNone/>
+            </a:pPr>
+            <a:r>
+              <a:rPr lang="en-US" sz="1800" b="0" i="0" u="none" strike="noStrike" dirty="0">
+                <a:solidFill>
+                  <a:srgbClr val="536782"/>
+                </a:solidFill>
+                <a:latin typeface="Calibri"/>
+                <a:cs typeface="Calibri"/>
+              </a:rPr>
+              <a:t>Your next big idea</a:t>
+            </a:r>
+            <a:endParaRPr lang="en-US" sz="1800" b="0" i="0" u="none" strike="noStrike" dirty="0">
+              <a:solidFill>
+                <a:srgbClr val="536782"/>
+              </a:solidFill>
+              <a:latin typeface="Calibri"/>
+              <a:cs typeface="Calibri"/>
+            </a:endParaRPr>
+          </a:p>
+        </p:txBody>
+      </p:sp>
+      <p:sp>
+        <p:nvSpPr>
+          <p:cNvPr id="14" name="TextBox 44"/>
+          <p:cNvSpPr txBox="1"/>
+          <p:nvPr/>
+        </p:nvSpPr>
+        <p:spPr>
+          <a:xfrm>
+            <a:off x="914400" y="5918200"/>
+            <a:ext cx="6223000" cy="3225800"/>
+          </a:xfrm>
+          <a:prstGeom prst="rect">
+            <a:avLst/>
+          </a:prstGeom>
+          <a:noFill/>
+          <a:ln>
+            <a:noFill/>
+          </a:ln>
+        </p:spPr>
+        <p:txBody>
+          <a:bodyPr wrap="square" lIns="0" tIns="0" rIns="0" bIns="0" anchor="t" rtlCol="0">
+            <a:spAutoFit/>
+          </a:bodyPr>
+          <a:lstStyle/>
+          <a:p>
+            <a:pPr algn="l" marL="0" indent="0">
+              <a:lnSpc>
+                <a:spcPct val="100000"/>
+              </a:lnSpc>
+              <a:spcBef>
+                <a:spcPts val="0"/>
+              </a:spcBef>
+              <a:spcAft>
+                <a:spcPts val="0"/>
+              </a:spcAft>
+              <a:buNone/>
+            </a:pPr>
+            <a:r>
+              <a:rPr lang="en-US" sz="2500" b="0" i="0" u="none" strike="noStrike" dirty="0">
+                <a:solidFill>
+                  <a:srgbClr val="536782"/>
+                </a:solidFill>
+                <a:latin typeface="Calibri"/>
+                <a:cs typeface="Calibri"/>
+              </a:rPr>
+              <a:t>Themes, charts, and animations.</a:t>
+            </a:r>
+            <a:endParaRPr lang="en-US" sz="2500" b="0" i="0" u="none" strike="noStrike" dirty="0">
+              <a:solidFill>
+                <a:srgbClr val="536782"/>
+              </a:solidFill>
+              <a:latin typeface="Calibri"/>
+              <a:cs typeface="Calibri"/>
+            </a:endParaRPr>
+          </a:p>
+          <a:p>
+            <a:pPr algn="l" marL="0" indent="0">
+              <a:lnSpc>
+                <a:spcPct val="100000"/>
+              </a:lnSpc>
+              <a:spcBef>
+                <a:spcPts val="0"/>
+              </a:spcBef>
+              <a:spcAft>
+                <a:spcPts val="0"/>
+              </a:spcAft>
+              <a:buNone/>
+            </a:pPr>
+            <a:r>
+              <a:rPr lang="en-US" sz="2500" b="0" i="0" u="none" strike="noStrike" dirty="0">
+                <a:solidFill>
+                  <a:srgbClr val="536782"/>
+                </a:solidFill>
+                <a:latin typeface="Calibri"/>
+                <a:cs typeface="Calibri"/>
+              </a:rPr>
+              <a:t>Speaker notes for your moment.</a:t>
+            </a:r>
+            <a:endParaRPr lang="en-US" sz="2500" b="0" i="0" u="none" strike="noStrike" dirty="0">
+              <a:solidFill>
+                <a:srgbClr val="536782"/>
+              </a:solidFill>
+              <a:latin typeface="Calibri"/>
+              <a:cs typeface="Calibri"/>
+            </a:endParaRPr>
+          </a:p>
+        </p:txBody>
+      </p:sp>
+      <p:sp>
+        <p:nvSpPr>
+          <p:cNvPr id="15" name="TextBox 45"/>
+          <p:cNvSpPr txBox="1"/>
+          <p:nvPr/>
+        </p:nvSpPr>
+        <p:spPr>
+          <a:xfrm>
+            <a:off x="914400" y="8305800"/>
+            <a:ext cx="14427200" cy="838200"/>
+          </a:xfrm>
+          <a:prstGeom prst="rect">
+            <a:avLst/>
+          </a:prstGeom>
+          <a:noFill/>
+          <a:ln>
+            <a:noFill/>
+          </a:ln>
+        </p:spPr>
+        <p:txBody>
+          <a:bodyPr wrap="square" lIns="0" tIns="0" rIns="0" bIns="0" anchor="t" rtlCol="0">
+            <a:spAutoFit/>
+          </a:bodyPr>
+          <a:lstStyle/>
+          <a:p>
+            <a:pPr algn="l" marL="0" indent="0">
+              <a:lnSpc>
+                <a:spcPct val="100000"/>
+              </a:lnSpc>
+              <a:spcBef>
+                <a:spcPts val="0"/>
+              </a:spcBef>
+              <a:spcAft>
+                <a:spcPts val="0"/>
+              </a:spcAft>
+              <a:buNone/>
+            </a:pPr>
+            <a:r>
+              <a:rPr lang="en-US" sz="1800" b="1" i="0" u="none" strike="noStrike" dirty="0">
+                <a:solidFill>
+                  <a:srgbClr val="C74724"/>
+                </a:solidFill>
+                <a:latin typeface="Calibri"/>
+                <a:cs typeface="Calibri"/>
+              </a:rPr>
+              <a:t>PPTX  ·  THEMES  ·  CHARTS  ·  ANIMATIONS</a:t>
+            </a:r>
+            <a:endParaRPr lang="en-US" sz="1800" b="1" i="0" u="none" strike="noStrike" dirty="0">
+              <a:solidFill>
+                <a:srgbClr val="C74724"/>
+              </a:solidFill>
+              <a:latin typeface="Calibri"/>
+              <a:cs typeface="Calibri"/>
+            </a:endParaRPr>
+          </a:p>
+        </p:txBody>
+      </p:sp>
+    </p:spTree>
+  </p:cSld>
+  <p:clrMapOvr>
+    <a:masterClrMapping/>
+  </p:clrMapOvr>
+  <p:transition spd="fast">
+    <p:fade/>
+  </p:transition>
+</p:sld>
+</file>
+
+<file path=ppt/slides/slide4.xml><?xml version="1.0" encoding="utf-8"?>
+<p:sld xmlns:a="http://schemas.openxmlformats.org/drawingml/2006/main" xmlns:r="http://schemas.openxmlformats.org/officeDocument/2006/relationships" xmlns:p="http://schemas.openxmlformats.org/presentationml/2006/main">
+  <p:cSld>
+    <p:bg>
+      <p:bgPr>
+        <a:solidFill>
+          <a:srgbClr val="EDF9F2"/>
+        </a:solidFill>
+        <a:effectLst/>
+      </p:bgPr>
+    </p:bg>
+    <p:spTree>
+      <p:nvGrpSpPr>
+        <p:cNvPr id="1" name=""/>
+        <p:cNvGrpSpPr/>
+        <p:nvPr/>
+      </p:nvGrpSpPr>
+      <p:grpSpPr>
+        <a:xfrm>
+          <a:off x="0" y="0"/>
+          <a:ext cx="0" cy="0"/>
+          <a:chOff x="0" y="0"/>
+          <a:chExt cx="0" cy="0"/>
+        </a:xfrm>
+      </p:grpSpPr>
+      <p:sp>
+        <p:nvSpPr>
+          <p:cNvPr id="2" name="TextBox 47"/>
+          <p:cNvSpPr txBox="1"/>
+          <p:nvPr/>
+        </p:nvSpPr>
+        <p:spPr>
+          <a:xfrm>
+            <a:off x="914400" y="508000"/>
+            <a:ext cx="14427200" cy="8636000"/>
+          </a:xfrm>
+          <a:prstGeom prst="rect">
+            <a:avLst/>
+          </a:prstGeom>
+          <a:noFill/>
+          <a:ln>
+            <a:noFill/>
+          </a:ln>
+        </p:spPr>
+        <p:txBody>
+          <a:bodyPr wrap="square" lIns="0" tIns="0" rIns="0" bIns="0" anchor="t" rtlCol="0">
+            <a:spAutoFit/>
+          </a:bodyPr>
+          <a:lstStyle/>
+          <a:p>
+            <a:pPr algn="l" marL="0" indent="0">
+              <a:lnSpc>
+                <a:spcPct val="100000"/>
+              </a:lnSpc>
+              <a:spcBef>
+                <a:spcPts val="0"/>
+              </a:spcBef>
+              <a:spcAft>
+                <a:spcPts val="0"/>
+              </a:spcAft>
+              <a:buNone/>
+            </a:pPr>
+            <a:r>
+              <a:rPr lang="en-US" sz="1600" b="1" i="0" u="none" strike="noStrike" dirty="0">
+                <a:solidFill>
+                  <a:srgbClr val="13794D"/>
+                </a:solidFill>
+                <a:latin typeface="Calibri"/>
+                <a:cs typeface="Calibri"/>
+              </a:rPr>
+              <a:t>03  /  MEET SHEETS</a:t>
+            </a:r>
+            <a:endParaRPr lang="en-US" sz="1600" b="1" i="0" u="none" strike="noStrike" dirty="0">
+              <a:solidFill>
+                <a:srgbClr val="13794D"/>
+              </a:solidFill>
+              <a:latin typeface="Calibri"/>
+              <a:cs typeface="Calibri"/>
+            </a:endParaRPr>
+          </a:p>
+        </p:txBody>
+      </p:sp>
+      <p:sp>
+        <p:nvSpPr>
+          <p:cNvPr id="3" name="TextBox 48"/>
+          <p:cNvSpPr txBox="1"/>
+          <p:nvPr/>
+        </p:nvSpPr>
+        <p:spPr>
+          <a:xfrm>
+            <a:off x="914400" y="1600200"/>
+            <a:ext cx="7747000" cy="7543800"/>
+          </a:xfrm>
+          <a:prstGeom prst="rect">
+            <a:avLst/>
+          </a:prstGeom>
+          <a:noFill/>
+          <a:ln>
+            <a:noFill/>
+          </a:ln>
+        </p:spPr>
+        <p:txBody>
+          <a:bodyPr wrap="square" lIns="0" tIns="0" rIns="0" bIns="0" anchor="t" rtlCol="0">
+            <a:spAutoFit/>
+          </a:bodyPr>
+          <a:lstStyle/>
+          <a:p>
+            <a:pPr algn="l" marL="0" indent="0">
+              <a:lnSpc>
+                <a:spcPct val="100000"/>
+              </a:lnSpc>
+              <a:spcBef>
+                <a:spcPts val="0"/>
+              </a:spcBef>
+              <a:spcAft>
+                <a:spcPts val="0"/>
+              </a:spcAft>
+              <a:buNone/>
+            </a:pPr>
+            <a:r>
+              <a:rPr lang="en-US" sz="7200" b="1" i="0" u="none" strike="noStrike" dirty="0">
+                <a:solidFill>
+                  <a:srgbClr val="132442"/>
+                </a:solidFill>
+                <a:latin typeface="Calibri"/>
+                <a:cs typeface="Calibri"/>
+              </a:rPr>
+              <a:t>Let the numbers</a:t>
+            </a:r>
+            <a:endParaRPr lang="en-US" sz="7200" b="1" i="0" u="none" strike="noStrike" dirty="0">
+              <a:solidFill>
+                <a:srgbClr val="132442"/>
+              </a:solidFill>
+              <a:latin typeface="Calibri"/>
+              <a:cs typeface="Calibri"/>
+            </a:endParaRPr>
+          </a:p>
+          <a:p>
+            <a:pPr algn="l" marL="0" indent="0">
+              <a:lnSpc>
+                <a:spcPct val="100000"/>
+              </a:lnSpc>
+              <a:spcBef>
+                <a:spcPts val="0"/>
+              </a:spcBef>
+              <a:spcAft>
+                <a:spcPts val="0"/>
+              </a:spcAft>
+              <a:buNone/>
+            </a:pPr>
+            <a:r>
+              <a:rPr lang="en-US" sz="7200" b="1" i="0" u="none" strike="noStrike" dirty="0">
+                <a:solidFill>
+                  <a:srgbClr val="132442"/>
+                </a:solidFill>
+                <a:latin typeface="Calibri"/>
+                <a:cs typeface="Calibri"/>
+              </a:rPr>
+              <a:t>tell the story.</a:t>
+            </a:r>
+            <a:endParaRPr lang="en-US" sz="7200" b="1" i="0" u="none" strike="noStrike" dirty="0">
+              <a:solidFill>
+                <a:srgbClr val="132442"/>
+              </a:solidFill>
+              <a:latin typeface="Calibri"/>
+              <a:cs typeface="Calibri"/>
+            </a:endParaRPr>
+          </a:p>
+        </p:txBody>
+      </p:sp>
+      <p:sp>
+        <p:nvSpPr>
+          <p:cNvPr id="4" name="TextBox 49"/>
+          <p:cNvSpPr txBox="1"/>
+          <p:nvPr/>
+        </p:nvSpPr>
+        <p:spPr>
+          <a:xfrm>
+            <a:off x="914400" y="4343400"/>
+            <a:ext cx="6159500" cy="4800600"/>
+          </a:xfrm>
+          <a:prstGeom prst="rect">
+            <a:avLst/>
+          </a:prstGeom>
+          <a:noFill/>
+          <a:ln>
+            <a:noFill/>
+          </a:ln>
+        </p:spPr>
+        <p:txBody>
+          <a:bodyPr wrap="square" lIns="0" tIns="0" rIns="0" bIns="0" anchor="t" rtlCol="0">
+            <a:spAutoFit/>
+          </a:bodyPr>
+          <a:lstStyle/>
+          <a:p>
+            <a:pPr algn="l" marL="0" indent="0">
+              <a:lnSpc>
+                <a:spcPct val="100000"/>
+              </a:lnSpc>
+              <a:spcBef>
+                <a:spcPts val="0"/>
+              </a:spcBef>
+              <a:spcAft>
+                <a:spcPts val="0"/>
+              </a:spcAft>
+              <a:buNone/>
+            </a:pPr>
+            <a:r>
+              <a:rPr lang="en-US" sz="2700" b="0" i="0" u="none" strike="noStrike" dirty="0">
+                <a:solidFill>
+                  <a:srgbClr val="536782"/>
+                </a:solidFill>
+                <a:latin typeface="Calibri"/>
+                <a:cs typeface="Calibri"/>
+              </a:rPr>
+              <a:t>Organize your data.</a:t>
+            </a:r>
+            <a:endParaRPr lang="en-US" sz="2700" b="0" i="0" u="none" strike="noStrike" dirty="0">
+              <a:solidFill>
+                <a:srgbClr val="536782"/>
+              </a:solidFill>
+              <a:latin typeface="Calibri"/>
+              <a:cs typeface="Calibri"/>
+            </a:endParaRPr>
+          </a:p>
+          <a:p>
+            <a:pPr algn="l" marL="0" indent="0">
+              <a:lnSpc>
+                <a:spcPct val="100000"/>
+              </a:lnSpc>
+              <a:spcBef>
+                <a:spcPts val="0"/>
+              </a:spcBef>
+              <a:spcAft>
+                <a:spcPts val="0"/>
+              </a:spcAft>
+              <a:buNone/>
+            </a:pPr>
+            <a:r>
+              <a:rPr lang="en-US" sz="2700" b="0" i="0" u="none" strike="noStrike" dirty="0">
+                <a:solidFill>
+                  <a:srgbClr val="536782"/>
+                </a:solidFill>
+                <a:latin typeface="Calibri"/>
+                <a:cs typeface="Calibri"/>
+              </a:rPr>
+              <a:t>Turn formulas into answers.</a:t>
+            </a:r>
+            <a:endParaRPr lang="en-US" sz="2700" b="0" i="0" u="none" strike="noStrike" dirty="0">
+              <a:solidFill>
+                <a:srgbClr val="536782"/>
+              </a:solidFill>
+              <a:latin typeface="Calibri"/>
+              <a:cs typeface="Calibri"/>
+            </a:endParaRPr>
+          </a:p>
+        </p:txBody>
+      </p:sp>
+      <p:sp>
+        <p:nvSpPr>
+          <p:cNvPr id="5" name="Rounded Rectangle 50"/>
+          <p:cNvSpPr/>
+          <p:nvPr/>
+        </p:nvSpPr>
+        <p:spPr>
+          <a:xfrm>
+            <a:off x="8305800" y="2235200"/>
+            <a:ext cx="7035800" cy="4445000"/>
+          </a:xfrm>
+          <a:prstGeom prst="roundRect">
+            <a:avLst/>
+          </a:prstGeom>
+          <a:solidFill>
+            <a:srgbClr val="FFFFFF"/>
+          </a:solidFill>
+          <a:ln>
+            <a:noFill/>
+          </a:ln>
+        </p:spPr>
+        <p:txBody>
+          <a:bodyPr wrap="square" lIns="91440" tIns="45720" rIns="91440" bIns="45720" anchor="ctr" rtlCol="0">
+            <a:noAutofit/>
+          </a:bodyPr>
+          <a:lstStyle/>
+          <a:p>
+            <a:pPr algn="ctr" marL="0" indent="0">
+              <a:lnSpc>
+                <a:spcPct val="100000"/>
+              </a:lnSpc>
+              <a:spcBef>
+                <a:spcPts val="0"/>
+              </a:spcBef>
+              <a:spcAft>
+                <a:spcPts val="0"/>
+              </a:spcAft>
+              <a:buNone/>
+            </a:pPr>
+            <a:endParaRPr lang="en-US" sz="1800" b="0" i="0" u="none" strike="noStrike" dirty="0">
+              <a:solidFill>
+                <a:srgbClr val="FFFFFF"/>
+              </a:solidFill>
+              <a:latin typeface="Calibri"/>
+              <a:cs typeface="Calibri"/>
+            </a:endParaRPr>
+          </a:p>
+        </p:txBody>
+      </p:sp>
+      <p:sp>
+        <p:nvSpPr>
+          <p:cNvPr id="6" name="Rounded Rectangle 51"/>
+          <p:cNvSpPr/>
+          <p:nvPr/>
+        </p:nvSpPr>
+        <p:spPr>
+          <a:xfrm>
+            <a:off x="8509000" y="2438400"/>
+            <a:ext cx="6629400" cy="584200"/>
+          </a:xfrm>
+          <a:prstGeom prst="roundRect">
+            <a:avLst/>
+          </a:prstGeom>
+          <a:solidFill>
+            <a:srgbClr val="E3F3E9"/>
+          </a:solidFill>
+          <a:ln>
+            <a:noFill/>
+          </a:ln>
+        </p:spPr>
+        <p:txBody>
+          <a:bodyPr wrap="square" lIns="91440" tIns="45720" rIns="91440" bIns="45720" anchor="ctr" rtlCol="0">
+            <a:noAutofit/>
+          </a:bodyPr>
+          <a:lstStyle/>
+          <a:p>
+            <a:pPr algn="ctr" marL="0" indent="0">
+              <a:lnSpc>
+                <a:spcPct val="100000"/>
+              </a:lnSpc>
+              <a:spcBef>
+                <a:spcPts val="0"/>
+              </a:spcBef>
+              <a:spcAft>
+                <a:spcPts val="0"/>
+              </a:spcAft>
+              <a:buNone/>
+            </a:pPr>
+            <a:endParaRPr lang="en-US" sz="1800" b="0" i="0" u="none" strike="noStrike" dirty="0">
+              <a:solidFill>
+                <a:srgbClr val="FFFFFF"/>
+              </a:solidFill>
+              <a:latin typeface="Calibri"/>
+              <a:cs typeface="Calibri"/>
+            </a:endParaRPr>
+          </a:p>
+        </p:txBody>
+      </p:sp>
+      <p:sp>
+        <p:nvSpPr>
+          <p:cNvPr id="7" name="TextBox 52"/>
+          <p:cNvSpPr txBox="1"/>
+          <p:nvPr/>
+        </p:nvSpPr>
+        <p:spPr>
+          <a:xfrm>
+            <a:off x="8712200" y="2540000"/>
+            <a:ext cx="6223000" cy="6604000"/>
+          </a:xfrm>
+          <a:prstGeom prst="rect">
+            <a:avLst/>
+          </a:prstGeom>
+          <a:noFill/>
+          <a:ln>
+            <a:noFill/>
+          </a:ln>
+        </p:spPr>
+        <p:txBody>
+          <a:bodyPr wrap="square" lIns="0" tIns="0" rIns="0" bIns="0" anchor="t" rtlCol="0">
+            <a:spAutoFit/>
+          </a:bodyPr>
+          <a:lstStyle/>
+          <a:p>
+            <a:pPr algn="l" marL="0" indent="0">
+              <a:lnSpc>
+                <a:spcPct val="100000"/>
+              </a:lnSpc>
+              <a:spcBef>
+                <a:spcPts val="0"/>
+              </a:spcBef>
+              <a:spcAft>
+                <a:spcPts val="0"/>
+              </a:spcAft>
+              <a:buNone/>
+            </a:pPr>
+            <a:r>
+              <a:rPr lang="en-US" sz="2200" b="0" i="0" u="none" strike="noStrike" dirty="0">
+                <a:solidFill>
+                  <a:srgbClr val="13794D"/>
+                </a:solidFill>
+                <a:latin typeface="Calibri"/>
+                <a:cs typeface="Calibri"/>
+              </a:rPr>
+              <a:t>fx    =SUM(C2:C4)</a:t>
+            </a:r>
+            <a:endParaRPr lang="en-US" sz="2200" b="0" i="0" u="none" strike="noStrike" dirty="0">
+              <a:solidFill>
+                <a:srgbClr val="13794D"/>
+              </a:solidFill>
+              <a:latin typeface="Calibri"/>
+              <a:cs typeface="Calibri"/>
+            </a:endParaRPr>
+          </a:p>
+        </p:txBody>
+      </p:sp>
+      <p:sp>
+        <p:nvSpPr>
+          <p:cNvPr id="8" name="Rectangle 53"/>
+          <p:cNvSpPr/>
+          <p:nvPr/>
+        </p:nvSpPr>
+        <p:spPr>
+          <a:xfrm>
+            <a:off x="8509000" y="3276600"/>
+            <a:ext cx="6629400" cy="609600"/>
+          </a:xfrm>
+          <a:prstGeom prst="rect">
+            <a:avLst/>
+          </a:prstGeom>
+          <a:solidFill>
+            <a:srgbClr val="E3F3E9"/>
+          </a:solidFill>
+          <a:ln>
+            <a:noFill/>
+          </a:ln>
+        </p:spPr>
+        <p:txBody>
+          <a:bodyPr wrap="square" lIns="91440" tIns="45720" rIns="91440" bIns="45720" anchor="ctr" rtlCol="0">
+            <a:noAutofit/>
+          </a:bodyPr>
+          <a:lstStyle/>
+          <a:p>
+            <a:pPr algn="ctr" marL="0" indent="0">
+              <a:lnSpc>
+                <a:spcPct val="100000"/>
+              </a:lnSpc>
+              <a:spcBef>
+                <a:spcPts val="0"/>
+              </a:spcBef>
+              <a:spcAft>
+                <a:spcPts val="0"/>
+              </a:spcAft>
+              <a:buNone/>
+            </a:pPr>
+            <a:endParaRPr lang="en-US" sz="1800" b="0" i="0" u="none" strike="noStrike" dirty="0">
+              <a:solidFill>
+                <a:srgbClr val="FFFFFF"/>
+              </a:solidFill>
+              <a:latin typeface="Calibri"/>
+              <a:cs typeface="Calibri"/>
+            </a:endParaRPr>
+          </a:p>
+        </p:txBody>
+      </p:sp>
+      <p:sp>
+        <p:nvSpPr>
+          <p:cNvPr id="9" name="TextBox 54"/>
+          <p:cNvSpPr txBox="1"/>
+          <p:nvPr/>
+        </p:nvSpPr>
+        <p:spPr>
+          <a:xfrm>
+            <a:off x="8712200" y="3378200"/>
+            <a:ext cx="2108200" cy="5765800"/>
+          </a:xfrm>
+          <a:prstGeom prst="rect">
+            <a:avLst/>
+          </a:prstGeom>
+          <a:noFill/>
+          <a:ln>
+            <a:noFill/>
+          </a:ln>
+        </p:spPr>
+        <p:txBody>
+          <a:bodyPr wrap="square" lIns="0" tIns="0" rIns="0" bIns="0" anchor="t" rtlCol="0">
+            <a:spAutoFit/>
+          </a:bodyPr>
+          <a:lstStyle/>
+          <a:p>
+            <a:pPr algn="l" marL="0" indent="0">
+              <a:lnSpc>
+                <a:spcPct val="100000"/>
+              </a:lnSpc>
+              <a:spcBef>
+                <a:spcPts val="0"/>
+              </a:spcBef>
+              <a:spcAft>
+                <a:spcPts val="0"/>
+              </a:spcAft>
+              <a:buNone/>
+            </a:pPr>
+            <a:r>
+              <a:rPr lang="en-US" sz="2200" b="1" i="0" u="none" strike="noStrike" dirty="0">
+                <a:solidFill>
+                  <a:srgbClr val="132442"/>
+                </a:solidFill>
+                <a:latin typeface="Calibri"/>
+                <a:cs typeface="Calibri"/>
+              </a:rPr>
+              <a:t>Project</a:t>
+            </a:r>
+            <a:endParaRPr lang="en-US" sz="2200" b="1" i="0" u="none" strike="noStrike" dirty="0">
+              <a:solidFill>
+                <a:srgbClr val="132442"/>
+              </a:solidFill>
+              <a:latin typeface="Calibri"/>
+              <a:cs typeface="Calibri"/>
+            </a:endParaRPr>
+          </a:p>
+        </p:txBody>
+      </p:sp>
+      <p:sp>
+        <p:nvSpPr>
+          <p:cNvPr id="10" name="TextBox 55"/>
+          <p:cNvSpPr txBox="1"/>
+          <p:nvPr/>
+        </p:nvSpPr>
+        <p:spPr>
+          <a:xfrm>
+            <a:off x="10922000" y="3378200"/>
+            <a:ext cx="2108200" cy="5765800"/>
+          </a:xfrm>
+          <a:prstGeom prst="rect">
+            <a:avLst/>
+          </a:prstGeom>
+          <a:noFill/>
+          <a:ln>
+            <a:noFill/>
+          </a:ln>
+        </p:spPr>
+        <p:txBody>
+          <a:bodyPr wrap="square" lIns="0" tIns="0" rIns="0" bIns="0" anchor="t" rtlCol="0">
+            <a:spAutoFit/>
+          </a:bodyPr>
+          <a:lstStyle/>
+          <a:p>
+            <a:pPr algn="l" marL="0" indent="0">
+              <a:lnSpc>
+                <a:spcPct val="100000"/>
+              </a:lnSpc>
+              <a:spcBef>
+                <a:spcPts val="0"/>
+              </a:spcBef>
+              <a:spcAft>
+                <a:spcPts val="0"/>
+              </a:spcAft>
+              <a:buNone/>
+            </a:pPr>
+            <a:r>
+              <a:rPr lang="en-US" sz="2200" b="1" i="0" u="none" strike="noStrike" dirty="0">
+                <a:solidFill>
+                  <a:srgbClr val="132442"/>
+                </a:solidFill>
+                <a:latin typeface="Calibri"/>
+                <a:cs typeface="Calibri"/>
+              </a:rPr>
+              <a:t>Budget</a:t>
+            </a:r>
+            <a:endParaRPr lang="en-US" sz="2200" b="1" i="0" u="none" strike="noStrike" dirty="0">
+              <a:solidFill>
+                <a:srgbClr val="132442"/>
+              </a:solidFill>
+              <a:latin typeface="Calibri"/>
+              <a:cs typeface="Calibri"/>
+            </a:endParaRPr>
+          </a:p>
+        </p:txBody>
+      </p:sp>
+      <p:sp>
+        <p:nvSpPr>
+          <p:cNvPr id="11" name="TextBox 56"/>
+          <p:cNvSpPr txBox="1"/>
+          <p:nvPr/>
+        </p:nvSpPr>
+        <p:spPr>
+          <a:xfrm>
+            <a:off x="13131800" y="3378200"/>
+            <a:ext cx="2108200" cy="5765800"/>
+          </a:xfrm>
+          <a:prstGeom prst="rect">
+            <a:avLst/>
+          </a:prstGeom>
+          <a:noFill/>
+          <a:ln>
+            <a:noFill/>
+          </a:ln>
+        </p:spPr>
+        <p:txBody>
+          <a:bodyPr wrap="square" lIns="0" tIns="0" rIns="0" bIns="0" anchor="t" rtlCol="0">
+            <a:spAutoFit/>
+          </a:bodyPr>
+          <a:lstStyle/>
+          <a:p>
+            <a:pPr algn="l" marL="0" indent="0">
+              <a:lnSpc>
+                <a:spcPct val="100000"/>
+              </a:lnSpc>
+              <a:spcBef>
+                <a:spcPts val="0"/>
+              </a:spcBef>
+              <a:spcAft>
+                <a:spcPts val="0"/>
+              </a:spcAft>
+              <a:buNone/>
+            </a:pPr>
+            <a:r>
+              <a:rPr lang="en-US" sz="2200" b="1" i="0" u="none" strike="noStrike" dirty="0">
+                <a:solidFill>
+                  <a:srgbClr val="132442"/>
+                </a:solidFill>
+                <a:latin typeface="Calibri"/>
+                <a:cs typeface="Calibri"/>
+              </a:rPr>
+              <a:t>Actual</a:t>
+            </a:r>
+            <a:endParaRPr lang="en-US" sz="2200" b="1" i="0" u="none" strike="noStrike" dirty="0">
+              <a:solidFill>
+                <a:srgbClr val="132442"/>
+              </a:solidFill>
+              <a:latin typeface="Calibri"/>
+              <a:cs typeface="Calibri"/>
+            </a:endParaRPr>
+          </a:p>
+        </p:txBody>
+      </p:sp>
+      <p:sp>
+        <p:nvSpPr>
+          <p:cNvPr id="12" name="Rectangle 57"/>
+          <p:cNvSpPr/>
+          <p:nvPr/>
+        </p:nvSpPr>
+        <p:spPr>
+          <a:xfrm>
+            <a:off x="8509000" y="3898900"/>
+            <a:ext cx="6629400" cy="609600"/>
+          </a:xfrm>
+          <a:prstGeom prst="rect">
+            <a:avLst/>
+          </a:prstGeom>
+          <a:solidFill>
+            <a:srgbClr val="F6FAF7"/>
+          </a:solidFill>
+          <a:ln>
+            <a:noFill/>
+          </a:ln>
+        </p:spPr>
+        <p:txBody>
+          <a:bodyPr wrap="square" lIns="91440" tIns="45720" rIns="91440" bIns="45720" anchor="ctr" rtlCol="0">
+            <a:noAutofit/>
+          </a:bodyPr>
+          <a:lstStyle/>
+          <a:p>
+            <a:pPr algn="ctr" marL="0" indent="0">
+              <a:lnSpc>
+                <a:spcPct val="100000"/>
+              </a:lnSpc>
+              <a:spcBef>
+                <a:spcPts val="0"/>
+              </a:spcBef>
+              <a:spcAft>
+                <a:spcPts val="0"/>
+              </a:spcAft>
+              <a:buNone/>
+            </a:pPr>
+            <a:endParaRPr lang="en-US" sz="1800" b="0" i="0" u="none" strike="noStrike" dirty="0">
+              <a:solidFill>
+                <a:srgbClr val="FFFFFF"/>
+              </a:solidFill>
+              <a:latin typeface="Calibri"/>
+              <a:cs typeface="Calibri"/>
+            </a:endParaRPr>
+          </a:p>
+        </p:txBody>
+      </p:sp>
+      <p:sp>
+        <p:nvSpPr>
+          <p:cNvPr id="13" name="TextBox 58"/>
+          <p:cNvSpPr txBox="1"/>
+          <p:nvPr/>
+        </p:nvSpPr>
+        <p:spPr>
+          <a:xfrm>
+            <a:off x="8712200" y="4000500"/>
+            <a:ext cx="2108200" cy="5143500"/>
+          </a:xfrm>
+          <a:prstGeom prst="rect">
+            <a:avLst/>
+          </a:prstGeom>
+          <a:noFill/>
+          <a:ln>
+            <a:noFill/>
+          </a:ln>
+        </p:spPr>
+        <p:txBody>
+          <a:bodyPr wrap="square" lIns="0" tIns="0" rIns="0" bIns="0" anchor="t" rtlCol="0">
+            <a:spAutoFit/>
+          </a:bodyPr>
+          <a:lstStyle/>
+          <a:p>
+            <a:pPr algn="l" marL="0" indent="0">
+              <a:lnSpc>
+                <a:spcPct val="100000"/>
+              </a:lnSpc>
+              <a:spcBef>
+                <a:spcPts val="0"/>
+              </a:spcBef>
+              <a:spcAft>
+                <a:spcPts val="0"/>
+              </a:spcAft>
+              <a:buNone/>
+            </a:pPr>
+            <a:r>
+              <a:rPr lang="en-US" sz="2200" b="0" i="0" u="none" strike="noStrike" dirty="0">
+                <a:solidFill>
+                  <a:srgbClr val="132442"/>
+                </a:solidFill>
+                <a:latin typeface="Calibri"/>
+                <a:cs typeface="Calibri"/>
+              </a:rPr>
+              <a:t>Design</a:t>
+            </a:r>
+            <a:endParaRPr lang="en-US" sz="2200" b="0" i="0" u="none" strike="noStrike" dirty="0">
+              <a:solidFill>
+                <a:srgbClr val="132442"/>
+              </a:solidFill>
+              <a:latin typeface="Calibri"/>
+              <a:cs typeface="Calibri"/>
+            </a:endParaRPr>
+          </a:p>
+        </p:txBody>
+      </p:sp>
+      <p:sp>
+        <p:nvSpPr>
+          <p:cNvPr id="14" name="TextBox 59"/>
+          <p:cNvSpPr txBox="1"/>
+          <p:nvPr/>
+        </p:nvSpPr>
+        <p:spPr>
+          <a:xfrm>
+            <a:off x="10922000" y="4000500"/>
+            <a:ext cx="2108200" cy="5143500"/>
+          </a:xfrm>
+          <a:prstGeom prst="rect">
+            <a:avLst/>
+          </a:prstGeom>
+          <a:noFill/>
+          <a:ln>
+            <a:noFill/>
+          </a:ln>
+        </p:spPr>
+        <p:txBody>
+          <a:bodyPr wrap="square" lIns="0" tIns="0" rIns="0" bIns="0" anchor="t" rtlCol="0">
+            <a:spAutoFit/>
+          </a:bodyPr>
+          <a:lstStyle/>
+          <a:p>
+            <a:pPr algn="l" marL="0" indent="0">
+              <a:lnSpc>
+                <a:spcPct val="100000"/>
+              </a:lnSpc>
+              <a:spcBef>
+                <a:spcPts val="0"/>
+              </a:spcBef>
+              <a:spcAft>
+                <a:spcPts val="0"/>
+              </a:spcAft>
+              <a:buNone/>
+            </a:pPr>
+            <a:r>
+              <a:rPr lang="en-US" sz="2200" b="0" i="0" u="none" strike="noStrike" dirty="0">
+                <a:solidFill>
+                  <a:srgbClr val="132442"/>
+                </a:solidFill>
+                <a:latin typeface="Calibri"/>
+                <a:cs typeface="Calibri"/>
+              </a:rPr>
+              <a:t>2,400</a:t>
+            </a:r>
+            <a:endParaRPr lang="en-US" sz="2200" b="0" i="0" u="none" strike="noStrike" dirty="0">
+              <a:solidFill>
+                <a:srgbClr val="132442"/>
+              </a:solidFill>
+              <a:latin typeface="Calibri"/>
+              <a:cs typeface="Calibri"/>
+            </a:endParaRPr>
+          </a:p>
+        </p:txBody>
+      </p:sp>
+      <p:sp>
+        <p:nvSpPr>
+          <p:cNvPr id="15" name="TextBox 60"/>
+          <p:cNvSpPr txBox="1"/>
+          <p:nvPr/>
+        </p:nvSpPr>
+        <p:spPr>
+          <a:xfrm>
+            <a:off x="13131800" y="4000500"/>
+            <a:ext cx="2108200" cy="5143500"/>
+          </a:xfrm>
+          <a:prstGeom prst="rect">
+            <a:avLst/>
+          </a:prstGeom>
+          <a:noFill/>
+          <a:ln>
+            <a:noFill/>
+          </a:ln>
+        </p:spPr>
+        <p:txBody>
+          <a:bodyPr wrap="square" lIns="0" tIns="0" rIns="0" bIns="0" anchor="t" rtlCol="0">
+            <a:spAutoFit/>
+          </a:bodyPr>
+          <a:lstStyle/>
+          <a:p>
+            <a:pPr algn="l" marL="0" indent="0">
+              <a:lnSpc>
+                <a:spcPct val="100000"/>
+              </a:lnSpc>
+              <a:spcBef>
+                <a:spcPts val="0"/>
+              </a:spcBef>
+              <a:spcAft>
+                <a:spcPts val="0"/>
+              </a:spcAft>
+              <a:buNone/>
+            </a:pPr>
+            <a:r>
+              <a:rPr lang="en-US" sz="2200" b="0" i="0" u="none" strike="noStrike" dirty="0">
+                <a:solidFill>
+                  <a:srgbClr val="132442"/>
+                </a:solidFill>
+                <a:latin typeface="Calibri"/>
+                <a:cs typeface="Calibri"/>
+              </a:rPr>
+              <a:t>2,100</a:t>
+            </a:r>
+            <a:endParaRPr lang="en-US" sz="2200" b="0" i="0" u="none" strike="noStrike" dirty="0">
+              <a:solidFill>
+                <a:srgbClr val="132442"/>
+              </a:solidFill>
+              <a:latin typeface="Calibri"/>
+              <a:cs typeface="Calibri"/>
+            </a:endParaRPr>
+          </a:p>
+        </p:txBody>
+      </p:sp>
+      <p:sp>
+        <p:nvSpPr>
+          <p:cNvPr id="16" name="Rectangle 61"/>
+          <p:cNvSpPr/>
+          <p:nvPr/>
+        </p:nvSpPr>
+        <p:spPr>
+          <a:xfrm>
+            <a:off x="8509000" y="4521200"/>
+            <a:ext cx="6629400" cy="609600"/>
+          </a:xfrm>
+          <a:prstGeom prst="rect">
+            <a:avLst/>
+          </a:prstGeom>
+          <a:solidFill>
+            <a:srgbClr val="F6FAF7"/>
+          </a:solidFill>
+          <a:ln>
+            <a:noFill/>
+          </a:ln>
+        </p:spPr>
+        <p:txBody>
+          <a:bodyPr wrap="square" lIns="91440" tIns="45720" rIns="91440" bIns="45720" anchor="ctr" rtlCol="0">
+            <a:noAutofit/>
+          </a:bodyPr>
+          <a:lstStyle/>
+          <a:p>
+            <a:pPr algn="ctr" marL="0" indent="0">
+              <a:lnSpc>
+                <a:spcPct val="100000"/>
+              </a:lnSpc>
+              <a:spcBef>
+                <a:spcPts val="0"/>
+              </a:spcBef>
+              <a:spcAft>
+                <a:spcPts val="0"/>
+              </a:spcAft>
+              <a:buNone/>
+            </a:pPr>
+            <a:endParaRPr lang="en-US" sz="1800" b="0" i="0" u="none" strike="noStrike" dirty="0">
+              <a:solidFill>
+                <a:srgbClr val="FFFFFF"/>
+              </a:solidFill>
+              <a:latin typeface="Calibri"/>
+              <a:cs typeface="Calibri"/>
+            </a:endParaRPr>
+          </a:p>
+        </p:txBody>
+      </p:sp>
+      <p:sp>
+        <p:nvSpPr>
+          <p:cNvPr id="17" name="TextBox 62"/>
+          <p:cNvSpPr txBox="1"/>
+          <p:nvPr/>
+        </p:nvSpPr>
+        <p:spPr>
+          <a:xfrm>
+            <a:off x="8712200" y="4622800"/>
+            <a:ext cx="2108200" cy="4521200"/>
+          </a:xfrm>
+          <a:prstGeom prst="rect">
+            <a:avLst/>
+          </a:prstGeom>
+          <a:noFill/>
+          <a:ln>
+            <a:noFill/>
+          </a:ln>
+        </p:spPr>
+        <p:txBody>
+          <a:bodyPr wrap="square" lIns="0" tIns="0" rIns="0" bIns="0" anchor="t" rtlCol="0">
+            <a:spAutoFit/>
+          </a:bodyPr>
+          <a:lstStyle/>
+          <a:p>
+            <a:pPr algn="l" marL="0" indent="0">
+              <a:lnSpc>
+                <a:spcPct val="100000"/>
+              </a:lnSpc>
+              <a:spcBef>
+                <a:spcPts val="0"/>
+              </a:spcBef>
+              <a:spcAft>
+                <a:spcPts val="0"/>
+              </a:spcAft>
+              <a:buNone/>
+            </a:pPr>
+            <a:r>
+              <a:rPr lang="en-US" sz="2200" b="0" i="0" u="none" strike="noStrike" dirty="0">
+                <a:solidFill>
+                  <a:srgbClr val="132442"/>
+                </a:solidFill>
+                <a:latin typeface="Calibri"/>
+                <a:cs typeface="Calibri"/>
+              </a:rPr>
+              <a:t>Build</a:t>
+            </a:r>
+            <a:endParaRPr lang="en-US" sz="2200" b="0" i="0" u="none" strike="noStrike" dirty="0">
+              <a:solidFill>
+                <a:srgbClr val="132442"/>
+              </a:solidFill>
+              <a:latin typeface="Calibri"/>
+              <a:cs typeface="Calibri"/>
+            </a:endParaRPr>
+          </a:p>
+        </p:txBody>
+      </p:sp>
+      <p:sp>
+        <p:nvSpPr>
+          <p:cNvPr id="18" name="TextBox 63"/>
+          <p:cNvSpPr txBox="1"/>
+          <p:nvPr/>
+        </p:nvSpPr>
+        <p:spPr>
+          <a:xfrm>
+            <a:off x="10922000" y="4622800"/>
+            <a:ext cx="2108200" cy="4521200"/>
+          </a:xfrm>
+          <a:prstGeom prst="rect">
+            <a:avLst/>
+          </a:prstGeom>
+          <a:noFill/>
+          <a:ln>
+            <a:noFill/>
+          </a:ln>
+        </p:spPr>
+        <p:txBody>
+          <a:bodyPr wrap="square" lIns="0" tIns="0" rIns="0" bIns="0" anchor="t" rtlCol="0">
+            <a:spAutoFit/>
+          </a:bodyPr>
+          <a:lstStyle/>
+          <a:p>
+            <a:pPr algn="l" marL="0" indent="0">
+              <a:lnSpc>
+                <a:spcPct val="100000"/>
+              </a:lnSpc>
+              <a:spcBef>
+                <a:spcPts val="0"/>
+              </a:spcBef>
+              <a:spcAft>
+                <a:spcPts val="0"/>
+              </a:spcAft>
+              <a:buNone/>
+            </a:pPr>
+            <a:r>
+              <a:rPr lang="en-US" sz="2200" b="0" i="0" u="none" strike="noStrike" dirty="0">
+                <a:solidFill>
+                  <a:srgbClr val="132442"/>
+                </a:solidFill>
+                <a:latin typeface="Calibri"/>
+                <a:cs typeface="Calibri"/>
+              </a:rPr>
+              <a:t>6,800</a:t>
+            </a:r>
+            <a:endParaRPr lang="en-US" sz="2200" b="0" i="0" u="none" strike="noStrike" dirty="0">
+              <a:solidFill>
+                <a:srgbClr val="132442"/>
+              </a:solidFill>
+              <a:latin typeface="Calibri"/>
+              <a:cs typeface="Calibri"/>
+            </a:endParaRPr>
+          </a:p>
+        </p:txBody>
+      </p:sp>
+      <p:sp>
+        <p:nvSpPr>
+          <p:cNvPr id="19" name="TextBox 64"/>
+          <p:cNvSpPr txBox="1"/>
+          <p:nvPr/>
+        </p:nvSpPr>
+        <p:spPr>
+          <a:xfrm>
+            <a:off x="13131800" y="4622800"/>
+            <a:ext cx="2108200" cy="4521200"/>
+          </a:xfrm>
+          <a:prstGeom prst="rect">
+            <a:avLst/>
+          </a:prstGeom>
+          <a:noFill/>
+          <a:ln>
+            <a:noFill/>
+          </a:ln>
+        </p:spPr>
+        <p:txBody>
+          <a:bodyPr wrap="square" lIns="0" tIns="0" rIns="0" bIns="0" anchor="t" rtlCol="0">
+            <a:spAutoFit/>
+          </a:bodyPr>
+          <a:lstStyle/>
+          <a:p>
+            <a:pPr algn="l" marL="0" indent="0">
+              <a:lnSpc>
+                <a:spcPct val="100000"/>
+              </a:lnSpc>
+              <a:spcBef>
+                <a:spcPts val="0"/>
+              </a:spcBef>
+              <a:spcAft>
+                <a:spcPts val="0"/>
+              </a:spcAft>
+              <a:buNone/>
+            </a:pPr>
+            <a:r>
+              <a:rPr lang="en-US" sz="2200" b="0" i="0" u="none" strike="noStrike" dirty="0">
+                <a:solidFill>
+                  <a:srgbClr val="132442"/>
+                </a:solidFill>
+                <a:latin typeface="Calibri"/>
+                <a:cs typeface="Calibri"/>
+              </a:rPr>
+              <a:t>6,500</a:t>
+            </a:r>
+            <a:endParaRPr lang="en-US" sz="2200" b="0" i="0" u="none" strike="noStrike" dirty="0">
+              <a:solidFill>
+                <a:srgbClr val="132442"/>
+              </a:solidFill>
+              <a:latin typeface="Calibri"/>
+              <a:cs typeface="Calibri"/>
+            </a:endParaRPr>
+          </a:p>
+        </p:txBody>
+      </p:sp>
+      <p:sp>
+        <p:nvSpPr>
+          <p:cNvPr id="20" name="Rectangle 65"/>
+          <p:cNvSpPr/>
+          <p:nvPr/>
+        </p:nvSpPr>
+        <p:spPr>
+          <a:xfrm>
+            <a:off x="8509000" y="5143500"/>
+            <a:ext cx="6629400" cy="609600"/>
+          </a:xfrm>
+          <a:prstGeom prst="rect">
+            <a:avLst/>
+          </a:prstGeom>
+          <a:solidFill>
+            <a:srgbClr val="F6FAF7"/>
+          </a:solidFill>
+          <a:ln>
+            <a:noFill/>
+          </a:ln>
+        </p:spPr>
+        <p:txBody>
+          <a:bodyPr wrap="square" lIns="91440" tIns="45720" rIns="91440" bIns="45720" anchor="ctr" rtlCol="0">
+            <a:noAutofit/>
+          </a:bodyPr>
+          <a:lstStyle/>
+          <a:p>
+            <a:pPr algn="ctr" marL="0" indent="0">
+              <a:lnSpc>
+                <a:spcPct val="100000"/>
+              </a:lnSpc>
+              <a:spcBef>
+                <a:spcPts val="0"/>
+              </a:spcBef>
+              <a:spcAft>
+                <a:spcPts val="0"/>
+              </a:spcAft>
+              <a:buNone/>
+            </a:pPr>
+            <a:endParaRPr lang="en-US" sz="1800" b="0" i="0" u="none" strike="noStrike" dirty="0">
+              <a:solidFill>
+                <a:srgbClr val="FFFFFF"/>
+              </a:solidFill>
+              <a:latin typeface="Calibri"/>
+              <a:cs typeface="Calibri"/>
+            </a:endParaRPr>
+          </a:p>
+        </p:txBody>
+      </p:sp>
+      <p:sp>
+        <p:nvSpPr>
+          <p:cNvPr id="21" name="TextBox 66"/>
+          <p:cNvSpPr txBox="1"/>
+          <p:nvPr/>
+        </p:nvSpPr>
+        <p:spPr>
+          <a:xfrm>
+            <a:off x="8712200" y="5245100"/>
+            <a:ext cx="2108200" cy="3898900"/>
+          </a:xfrm>
+          <a:prstGeom prst="rect">
+            <a:avLst/>
+          </a:prstGeom>
+          <a:noFill/>
+          <a:ln>
+            <a:noFill/>
+          </a:ln>
+        </p:spPr>
+        <p:txBody>
+          <a:bodyPr wrap="square" lIns="0" tIns="0" rIns="0" bIns="0" anchor="t" rtlCol="0">
+            <a:spAutoFit/>
+          </a:bodyPr>
+          <a:lstStyle/>
+          <a:p>
+            <a:pPr algn="l" marL="0" indent="0">
+              <a:lnSpc>
+                <a:spcPct val="100000"/>
+              </a:lnSpc>
+              <a:spcBef>
+                <a:spcPts val="0"/>
+              </a:spcBef>
+              <a:spcAft>
+                <a:spcPts val="0"/>
+              </a:spcAft>
+              <a:buNone/>
+            </a:pPr>
+            <a:r>
+              <a:rPr lang="en-US" sz="2200" b="0" i="0" u="none" strike="noStrike" dirty="0">
+                <a:solidFill>
+                  <a:srgbClr val="132442"/>
+                </a:solidFill>
+                <a:latin typeface="Calibri"/>
+                <a:cs typeface="Calibri"/>
+              </a:rPr>
+              <a:t>Launch</a:t>
+            </a:r>
+            <a:endParaRPr lang="en-US" sz="2200" b="0" i="0" u="none" strike="noStrike" dirty="0">
+              <a:solidFill>
+                <a:srgbClr val="132442"/>
+              </a:solidFill>
+              <a:latin typeface="Calibri"/>
+              <a:cs typeface="Calibri"/>
+            </a:endParaRPr>
+          </a:p>
+        </p:txBody>
+      </p:sp>
+      <p:sp>
+        <p:nvSpPr>
+          <p:cNvPr id="22" name="TextBox 67"/>
+          <p:cNvSpPr txBox="1"/>
+          <p:nvPr/>
+        </p:nvSpPr>
+        <p:spPr>
+          <a:xfrm>
+            <a:off x="10922000" y="5245100"/>
+            <a:ext cx="2108200" cy="3898900"/>
+          </a:xfrm>
+          <a:prstGeom prst="rect">
+            <a:avLst/>
+          </a:prstGeom>
+          <a:noFill/>
+          <a:ln>
+            <a:noFill/>
+          </a:ln>
+        </p:spPr>
+        <p:txBody>
+          <a:bodyPr wrap="square" lIns="0" tIns="0" rIns="0" bIns="0" anchor="t" rtlCol="0">
+            <a:spAutoFit/>
+          </a:bodyPr>
+          <a:lstStyle/>
+          <a:p>
+            <a:pPr algn="l" marL="0" indent="0">
+              <a:lnSpc>
+                <a:spcPct val="100000"/>
+              </a:lnSpc>
+              <a:spcBef>
+                <a:spcPts val="0"/>
+              </a:spcBef>
+              <a:spcAft>
+                <a:spcPts val="0"/>
+              </a:spcAft>
+              <a:buNone/>
+            </a:pPr>
+            <a:r>
+              <a:rPr lang="en-US" sz="2200" b="0" i="0" u="none" strike="noStrike" dirty="0">
+                <a:solidFill>
+                  <a:srgbClr val="132442"/>
+                </a:solidFill>
+                <a:latin typeface="Calibri"/>
+                <a:cs typeface="Calibri"/>
+              </a:rPr>
+              <a:t>1,800</a:t>
+            </a:r>
+            <a:endParaRPr lang="en-US" sz="2200" b="0" i="0" u="none" strike="noStrike" dirty="0">
+              <a:solidFill>
+                <a:srgbClr val="132442"/>
+              </a:solidFill>
+              <a:latin typeface="Calibri"/>
+              <a:cs typeface="Calibri"/>
+            </a:endParaRPr>
+          </a:p>
+        </p:txBody>
+      </p:sp>
+      <p:sp>
+        <p:nvSpPr>
+          <p:cNvPr id="23" name="TextBox 68"/>
+          <p:cNvSpPr txBox="1"/>
+          <p:nvPr/>
+        </p:nvSpPr>
+        <p:spPr>
+          <a:xfrm>
+            <a:off x="13131800" y="5245100"/>
+            <a:ext cx="2108200" cy="3898900"/>
+          </a:xfrm>
+          <a:prstGeom prst="rect">
+            <a:avLst/>
+          </a:prstGeom>
+          <a:noFill/>
+          <a:ln>
+            <a:noFill/>
+          </a:ln>
+        </p:spPr>
+        <p:txBody>
+          <a:bodyPr wrap="square" lIns="0" tIns="0" rIns="0" bIns="0" anchor="t" rtlCol="0">
+            <a:spAutoFit/>
+          </a:bodyPr>
+          <a:lstStyle/>
+          <a:p>
+            <a:pPr algn="l" marL="0" indent="0">
+              <a:lnSpc>
+                <a:spcPct val="100000"/>
+              </a:lnSpc>
+              <a:spcBef>
+                <a:spcPts val="0"/>
+              </a:spcBef>
+              <a:spcAft>
+                <a:spcPts val="0"/>
+              </a:spcAft>
+              <a:buNone/>
+            </a:pPr>
+            <a:r>
+              <a:rPr lang="en-US" sz="2200" b="0" i="0" u="none" strike="noStrike" dirty="0">
+                <a:solidFill>
+                  <a:srgbClr val="132442"/>
+                </a:solidFill>
+                <a:latin typeface="Calibri"/>
+                <a:cs typeface="Calibri"/>
+              </a:rPr>
+              <a:t>1,400</a:t>
+            </a:r>
+            <a:endParaRPr lang="en-US" sz="2200" b="0" i="0" u="none" strike="noStrike" dirty="0">
+              <a:solidFill>
+                <a:srgbClr val="132442"/>
+              </a:solidFill>
+              <a:latin typeface="Calibri"/>
+              <a:cs typeface="Calibri"/>
+            </a:endParaRPr>
+          </a:p>
+        </p:txBody>
+      </p:sp>
+      <p:sp>
+        <p:nvSpPr>
+          <p:cNvPr id="24" name="Rectangle 69"/>
+          <p:cNvSpPr/>
+          <p:nvPr/>
+        </p:nvSpPr>
+        <p:spPr>
+          <a:xfrm>
+            <a:off x="8509000" y="5765800"/>
+            <a:ext cx="6629400" cy="609600"/>
+          </a:xfrm>
+          <a:prstGeom prst="rect">
+            <a:avLst/>
+          </a:prstGeom>
+          <a:solidFill>
+            <a:srgbClr val="13794D"/>
+          </a:solidFill>
+          <a:ln>
+            <a:noFill/>
+          </a:ln>
+        </p:spPr>
+        <p:txBody>
+          <a:bodyPr wrap="square" lIns="91440" tIns="45720" rIns="91440" bIns="45720" anchor="ctr" rtlCol="0">
+            <a:noAutofit/>
+          </a:bodyPr>
+          <a:lstStyle/>
+          <a:p>
+            <a:pPr algn="ctr" marL="0" indent="0">
+              <a:lnSpc>
+                <a:spcPct val="100000"/>
+              </a:lnSpc>
+              <a:spcBef>
+                <a:spcPts val="0"/>
+              </a:spcBef>
+              <a:spcAft>
+                <a:spcPts val="0"/>
+              </a:spcAft>
+              <a:buNone/>
+            </a:pPr>
+            <a:endParaRPr lang="en-US" sz="1800" b="0" i="0" u="none" strike="noStrike" dirty="0">
+              <a:solidFill>
+                <a:srgbClr val="FFFFFF"/>
+              </a:solidFill>
+              <a:latin typeface="Calibri"/>
+              <a:cs typeface="Calibri"/>
+            </a:endParaRPr>
+          </a:p>
+        </p:txBody>
+      </p:sp>
+      <p:sp>
+        <p:nvSpPr>
+          <p:cNvPr id="25" name="TextBox 70"/>
+          <p:cNvSpPr txBox="1"/>
+          <p:nvPr/>
+        </p:nvSpPr>
+        <p:spPr>
+          <a:xfrm>
+            <a:off x="8712200" y="5867400"/>
+            <a:ext cx="2108200" cy="3276600"/>
+          </a:xfrm>
+          <a:prstGeom prst="rect">
+            <a:avLst/>
+          </a:prstGeom>
+          <a:noFill/>
+          <a:ln>
+            <a:noFill/>
+          </a:ln>
+        </p:spPr>
+        <p:txBody>
+          <a:bodyPr wrap="square" lIns="0" tIns="0" rIns="0" bIns="0" anchor="t" rtlCol="0">
+            <a:spAutoFit/>
+          </a:bodyPr>
+          <a:lstStyle/>
+          <a:p>
+            <a:pPr algn="l" marL="0" indent="0">
+              <a:lnSpc>
+                <a:spcPct val="100000"/>
+              </a:lnSpc>
+              <a:spcBef>
+                <a:spcPts val="0"/>
+              </a:spcBef>
+              <a:spcAft>
+                <a:spcPts val="0"/>
+              </a:spcAft>
+              <a:buNone/>
+            </a:pPr>
+            <a:r>
+              <a:rPr lang="en-US" sz="2200" b="1" i="0" u="none" strike="noStrike" dirty="0">
+                <a:solidFill>
+                  <a:srgbClr val="FFFFFF"/>
+                </a:solidFill>
+                <a:latin typeface="Calibri"/>
+                <a:cs typeface="Calibri"/>
+              </a:rPr>
+              <a:t>Total</a:t>
+            </a:r>
+            <a:endParaRPr lang="en-US" sz="2200" b="1" i="0" u="none" strike="noStrike" dirty="0">
+              <a:solidFill>
+                <a:srgbClr val="FFFFFF"/>
+              </a:solidFill>
+              <a:latin typeface="Calibri"/>
+              <a:cs typeface="Calibri"/>
+            </a:endParaRPr>
+          </a:p>
+        </p:txBody>
+      </p:sp>
+      <p:sp>
+        <p:nvSpPr>
+          <p:cNvPr id="26" name="TextBox 71"/>
+          <p:cNvSpPr txBox="1"/>
+          <p:nvPr/>
+        </p:nvSpPr>
+        <p:spPr>
+          <a:xfrm>
+            <a:off x="10922000" y="5867400"/>
+            <a:ext cx="2108200" cy="3276600"/>
+          </a:xfrm>
+          <a:prstGeom prst="rect">
+            <a:avLst/>
+          </a:prstGeom>
+          <a:noFill/>
+          <a:ln>
+            <a:noFill/>
+          </a:ln>
+        </p:spPr>
+        <p:txBody>
+          <a:bodyPr wrap="square" lIns="0" tIns="0" rIns="0" bIns="0" anchor="t" rtlCol="0">
+            <a:spAutoFit/>
+          </a:bodyPr>
+          <a:lstStyle/>
+          <a:p>
+            <a:pPr algn="l" marL="0" indent="0">
+              <a:lnSpc>
+                <a:spcPct val="100000"/>
+              </a:lnSpc>
+              <a:spcBef>
+                <a:spcPts val="0"/>
+              </a:spcBef>
+              <a:spcAft>
+                <a:spcPts val="0"/>
+              </a:spcAft>
+              <a:buNone/>
+            </a:pPr>
+            <a:r>
+              <a:rPr lang="en-US" sz="2200" b="1" i="0" u="none" strike="noStrike" dirty="0">
+                <a:solidFill>
+                  <a:srgbClr val="FFFFFF"/>
+                </a:solidFill>
+                <a:latin typeface="Calibri"/>
+                <a:cs typeface="Calibri"/>
+              </a:rPr>
+              <a:t>11,000</a:t>
+            </a:r>
+            <a:endParaRPr lang="en-US" sz="2200" b="1" i="0" u="none" strike="noStrike" dirty="0">
+              <a:solidFill>
+                <a:srgbClr val="FFFFFF"/>
+              </a:solidFill>
+              <a:latin typeface="Calibri"/>
+              <a:cs typeface="Calibri"/>
+            </a:endParaRPr>
+          </a:p>
+        </p:txBody>
+      </p:sp>
+      <p:sp>
+        <p:nvSpPr>
+          <p:cNvPr id="27" name="TextBox 72"/>
+          <p:cNvSpPr txBox="1"/>
+          <p:nvPr/>
+        </p:nvSpPr>
+        <p:spPr>
+          <a:xfrm>
+            <a:off x="13131800" y="5867400"/>
+            <a:ext cx="2108200" cy="3276600"/>
+          </a:xfrm>
+          <a:prstGeom prst="rect">
+            <a:avLst/>
+          </a:prstGeom>
+          <a:noFill/>
+          <a:ln>
+            <a:noFill/>
+          </a:ln>
+        </p:spPr>
+        <p:txBody>
+          <a:bodyPr wrap="square" lIns="0" tIns="0" rIns="0" bIns="0" anchor="t" rtlCol="0">
+            <a:spAutoFit/>
+          </a:bodyPr>
+          <a:lstStyle/>
+          <a:p>
+            <a:pPr algn="l" marL="0" indent="0">
+              <a:lnSpc>
+                <a:spcPct val="100000"/>
+              </a:lnSpc>
+              <a:spcBef>
+                <a:spcPts val="0"/>
+              </a:spcBef>
+              <a:spcAft>
+                <a:spcPts val="0"/>
+              </a:spcAft>
+              <a:buNone/>
+            </a:pPr>
+            <a:r>
+              <a:rPr lang="en-US" sz="2200" b="1" i="0" u="none" strike="noStrike" dirty="0">
+                <a:solidFill>
+                  <a:srgbClr val="FFFFFF"/>
+                </a:solidFill>
+                <a:latin typeface="Calibri"/>
+                <a:cs typeface="Calibri"/>
+              </a:rPr>
+              <a:t>10,000</a:t>
+            </a:r>
+            <a:endParaRPr lang="en-US" sz="2200" b="1" i="0" u="none" strike="noStrike" dirty="0">
+              <a:solidFill>
+                <a:srgbClr val="FFFFFF"/>
+              </a:solidFill>
+              <a:latin typeface="Calibri"/>
+              <a:cs typeface="Calibri"/>
+            </a:endParaRPr>
+          </a:p>
+        </p:txBody>
+      </p:sp>
+      <p:sp>
+        <p:nvSpPr>
+          <p:cNvPr id="28" name="TextBox 73"/>
+          <p:cNvSpPr txBox="1"/>
+          <p:nvPr/>
+        </p:nvSpPr>
+        <p:spPr>
+          <a:xfrm>
+            <a:off x="914400" y="5918200"/>
+            <a:ext cx="6223000" cy="3225800"/>
+          </a:xfrm>
+          <a:prstGeom prst="rect">
+            <a:avLst/>
+          </a:prstGeom>
+          <a:noFill/>
+          <a:ln>
+            <a:noFill/>
+          </a:ln>
+        </p:spPr>
+        <p:txBody>
+          <a:bodyPr wrap="square" lIns="0" tIns="0" rIns="0" bIns="0" anchor="t" rtlCol="0">
+            <a:spAutoFit/>
+          </a:bodyPr>
+          <a:lstStyle/>
+          <a:p>
+            <a:pPr algn="l" marL="0" indent="0">
+              <a:lnSpc>
+                <a:spcPct val="100000"/>
+              </a:lnSpc>
+              <a:spcBef>
+                <a:spcPts val="0"/>
+              </a:spcBef>
+              <a:spcAft>
+                <a:spcPts val="0"/>
+              </a:spcAft>
+              <a:buNone/>
+            </a:pPr>
+            <a:r>
+              <a:rPr lang="en-US" sz="2500" b="0" i="0" u="none" strike="noStrike" dirty="0">
+                <a:solidFill>
+                  <a:srgbClr val="536782"/>
+                </a:solidFill>
+                <a:latin typeface="Calibri"/>
+                <a:cs typeface="Calibri"/>
+              </a:rPr>
+              <a:t>Formulas, tables, and filters.</a:t>
+            </a:r>
+            <a:endParaRPr lang="en-US" sz="2500" b="0" i="0" u="none" strike="noStrike" dirty="0">
+              <a:solidFill>
+                <a:srgbClr val="536782"/>
+              </a:solidFill>
+              <a:latin typeface="Calibri"/>
+              <a:cs typeface="Calibri"/>
+            </a:endParaRPr>
+          </a:p>
+          <a:p>
+            <a:pPr algn="l" marL="0" indent="0">
+              <a:lnSpc>
+                <a:spcPct val="100000"/>
+              </a:lnSpc>
+              <a:spcBef>
+                <a:spcPts val="0"/>
+              </a:spcBef>
+              <a:spcAft>
+                <a:spcPts val="0"/>
+              </a:spcAft>
+              <a:buNone/>
+            </a:pPr>
+            <a:r>
+              <a:rPr lang="en-US" sz="2500" b="0" i="0" u="none" strike="noStrike" dirty="0">
+                <a:solidFill>
+                  <a:srgbClr val="536782"/>
+                </a:solidFill>
+                <a:latin typeface="Calibri"/>
+                <a:cs typeface="Calibri"/>
+              </a:rPr>
+              <a:t>Keep the whole picture in view.</a:t>
+            </a:r>
+            <a:endParaRPr lang="en-US" sz="2500" b="0" i="0" u="none" strike="noStrike" dirty="0">
+              <a:solidFill>
+                <a:srgbClr val="536782"/>
+              </a:solidFill>
+              <a:latin typeface="Calibri"/>
+              <a:cs typeface="Calibri"/>
+            </a:endParaRPr>
+          </a:p>
+        </p:txBody>
+      </p:sp>
+      <p:sp>
+        <p:nvSpPr>
+          <p:cNvPr id="29" name="TextBox 74"/>
+          <p:cNvSpPr txBox="1"/>
+          <p:nvPr/>
+        </p:nvSpPr>
+        <p:spPr>
+          <a:xfrm>
+            <a:off x="914400" y="8305800"/>
+            <a:ext cx="14427200" cy="838200"/>
+          </a:xfrm>
+          <a:prstGeom prst="rect">
+            <a:avLst/>
+          </a:prstGeom>
+          <a:noFill/>
+          <a:ln>
+            <a:noFill/>
+          </a:ln>
+        </p:spPr>
+        <p:txBody>
+          <a:bodyPr wrap="square" lIns="0" tIns="0" rIns="0" bIns="0" anchor="t" rtlCol="0">
+            <a:spAutoFit/>
+          </a:bodyPr>
+          <a:lstStyle/>
+          <a:p>
+            <a:pPr algn="l" marL="0" indent="0">
+              <a:lnSpc>
+                <a:spcPct val="100000"/>
+              </a:lnSpc>
+              <a:spcBef>
+                <a:spcPts val="0"/>
+              </a:spcBef>
+              <a:spcAft>
+                <a:spcPts val="0"/>
+              </a:spcAft>
+              <a:buNone/>
+            </a:pPr>
+            <a:r>
+              <a:rPr lang="en-US" sz="1800" b="1" i="0" u="none" strike="noStrike" dirty="0">
+                <a:solidFill>
+                  <a:srgbClr val="13794D"/>
+                </a:solidFill>
+                <a:latin typeface="Calibri"/>
+                <a:cs typeface="Calibri"/>
+              </a:rPr>
+              <a:t>XLSX  ·  CSV  ·  FORMULAS  ·  FILTERS</a:t>
+            </a:r>
+            <a:endParaRPr lang="en-US" sz="1800" b="1" i="0" u="none" strike="noStrike" dirty="0">
+              <a:solidFill>
+                <a:srgbClr val="13794D"/>
+              </a:solidFill>
+              <a:latin typeface="Calibri"/>
+              <a:cs typeface="Calibri"/>
+            </a:endParaRPr>
+          </a:p>
+        </p:txBody>
+      </p:sp>
+    </p:spTree>
+  </p:cSld>
+  <p:clrMapOvr>
+    <a:masterClrMapping/>
+  </p:clrMapOvr>
+  <p:transition spd="fast">
+    <p:fade/>
+  </p:transition>
+</p:sld>
+</file>
+
+<file path=ppt/slides/slide5.xml><?xml version="1.0" encoding="utf-8"?>
 <p:sld xmlns:a="http://schemas.openxmlformats.org/drawingml/2006/main" xmlns:r="http://schemas.openxmlformats.org/officeDocument/2006/relationships" xmlns:p="http://schemas.openxmlformats.org/presentationml/2006/main">
   <p:cSld>
     <p:bg>
@@ -3376,7 +6349,7 @@
       </p:grpSpPr>
       <p:sp>
         <p:nvSpPr>
-          <p:cNvPr id="2" name="TextBox 25"/>
+          <p:cNvPr id="2" name="TextBox 76"/>
           <p:cNvSpPr txBox="1"/>
           <p:nvPr/>
         </p:nvSpPr>
@@ -3419,7 +6392,7 @@
                 <a:latin typeface="Calibri"/>
                 <a:cs typeface="Calibri"/>
               </a:rPr>
-              <a:t>02  /  SIX PLATFORMS. ONE AMBITION.</a:t>
+              <a:t>04  /  SIX PLATFORMS. ONE AMBITION.</a:t>
             </a:r>
             <a:endParaRPr lang="en-US" sz="1600" b="1" i="0" u="none" strike="noStrike" dirty="0">
               <a:solidFill>
@@ -3433,7 +6406,7 @@
       </p:sp>
       <p:sp>
         <p:nvSpPr>
-          <p:cNvPr id="3" name="TextBox 26"/>
+          <p:cNvPr id="3" name="TextBox 77"/>
           <p:cNvSpPr txBox="1"/>
           <p:nvPr/>
         </p:nvSpPr>
@@ -3521,7 +6494,7 @@
       </p:sp>
       <p:sp>
         <p:nvSpPr>
-          <p:cNvPr id="4" name="TextBox 27"/>
+          <p:cNvPr id="4" name="TextBox 78"/>
           <p:cNvSpPr txBox="1"/>
           <p:nvPr/>
         </p:nvSpPr>
@@ -3609,7 +6582,7 @@
       </p:sp>
       <p:sp>
         <p:nvSpPr>
-          <p:cNvPr id="5" name="Rounded Rectangle 28"/>
+          <p:cNvPr id="5" name="Rounded Rectangle 79"/>
           <p:cNvSpPr/>
           <p:nvPr/>
         </p:nvSpPr>
@@ -3658,7 +6631,7 @@
       </p:sp>
       <p:sp>
         <p:nvSpPr>
-          <p:cNvPr id="6" name="TextBox 29"/>
+          <p:cNvPr id="6" name="TextBox 80"/>
           <p:cNvSpPr txBox="1"/>
           <p:nvPr/>
         </p:nvSpPr>
@@ -3715,7 +6688,7 @@
       </p:sp>
       <p:sp>
         <p:nvSpPr>
-          <p:cNvPr id="7" name="TextBox 30"/>
+          <p:cNvPr id="7" name="TextBox 81"/>
           <p:cNvSpPr txBox="1"/>
           <p:nvPr/>
         </p:nvSpPr>
@@ -3772,7 +6745,7 @@
       </p:sp>
       <p:sp>
         <p:nvSpPr>
-          <p:cNvPr id="8" name="Rounded Rectangle 31"/>
+          <p:cNvPr id="8" name="Rounded Rectangle 82"/>
           <p:cNvSpPr/>
           <p:nvPr/>
         </p:nvSpPr>
@@ -3821,7 +6794,7 @@
       </p:sp>
       <p:sp>
         <p:nvSpPr>
-          <p:cNvPr id="9" name="TextBox 32"/>
+          <p:cNvPr id="9" name="TextBox 83"/>
           <p:cNvSpPr txBox="1"/>
           <p:nvPr/>
         </p:nvSpPr>
@@ -3878,7 +6851,7 @@
       </p:sp>
       <p:sp>
         <p:nvSpPr>
-          <p:cNvPr id="10" name="TextBox 33"/>
+          <p:cNvPr id="10" name="TextBox 84"/>
           <p:cNvSpPr txBox="1"/>
           <p:nvPr/>
         </p:nvSpPr>
@@ -3935,7 +6908,7 @@
       </p:sp>
       <p:sp>
         <p:nvSpPr>
-          <p:cNvPr id="11" name="Rounded Rectangle 34"/>
+          <p:cNvPr id="11" name="Rounded Rectangle 85"/>
           <p:cNvSpPr/>
           <p:nvPr/>
         </p:nvSpPr>
@@ -3984,7 +6957,7 @@
       </p:sp>
       <p:sp>
         <p:nvSpPr>
-          <p:cNvPr id="12" name="TextBox 35"/>
+          <p:cNvPr id="12" name="TextBox 86"/>
           <p:cNvSpPr txBox="1"/>
           <p:nvPr/>
         </p:nvSpPr>
@@ -4041,7 +7014,7 @@
       </p:sp>
       <p:sp>
         <p:nvSpPr>
-          <p:cNvPr id="13" name="TextBox 36"/>
+          <p:cNvPr id="13" name="TextBox 87"/>
           <p:cNvSpPr txBox="1"/>
           <p:nvPr/>
         </p:nvSpPr>
@@ -4098,7 +7071,7 @@
       </p:sp>
       <p:sp>
         <p:nvSpPr>
-          <p:cNvPr id="14" name="Rounded Rectangle 37"/>
+          <p:cNvPr id="14" name="Rounded Rectangle 88"/>
           <p:cNvSpPr/>
           <p:nvPr/>
         </p:nvSpPr>
@@ -4147,7 +7120,7 @@
       </p:sp>
       <p:sp>
         <p:nvSpPr>
-          <p:cNvPr id="15" name="TextBox 38"/>
+          <p:cNvPr id="15" name="TextBox 89"/>
           <p:cNvSpPr txBox="1"/>
           <p:nvPr/>
         </p:nvSpPr>
@@ -4204,7 +7177,7 @@
       </p:sp>
       <p:sp>
         <p:nvSpPr>
-          <p:cNvPr id="16" name="TextBox 39"/>
+          <p:cNvPr id="16" name="TextBox 90"/>
           <p:cNvSpPr txBox="1"/>
           <p:nvPr/>
         </p:nvSpPr>
@@ -4261,7 +7234,7 @@
       </p:sp>
       <p:sp>
         <p:nvSpPr>
-          <p:cNvPr id="17" name="Rounded Rectangle 40"/>
+          <p:cNvPr id="17" name="Rounded Rectangle 91"/>
           <p:cNvSpPr/>
           <p:nvPr/>
         </p:nvSpPr>
@@ -4310,7 +7283,7 @@
       </p:sp>
       <p:sp>
         <p:nvSpPr>
-          <p:cNvPr id="18" name="TextBox 41"/>
+          <p:cNvPr id="18" name="TextBox 92"/>
           <p:cNvSpPr txBox="1"/>
           <p:nvPr/>
         </p:nvSpPr>
@@ -4367,7 +7340,7 @@
       </p:sp>
       <p:sp>
         <p:nvSpPr>
-          <p:cNvPr id="19" name="TextBox 42"/>
+          <p:cNvPr id="19" name="TextBox 93"/>
           <p:cNvSpPr txBox="1"/>
           <p:nvPr/>
         </p:nvSpPr>
@@ -4424,7 +7397,7 @@
       </p:sp>
       <p:sp>
         <p:nvSpPr>
-          <p:cNvPr id="20" name="Rounded Rectangle 43"/>
+          <p:cNvPr id="20" name="Rounded Rectangle 94"/>
           <p:cNvSpPr/>
           <p:nvPr/>
         </p:nvSpPr>
@@ -4473,7 +7446,7 @@
       </p:sp>
       <p:sp>
         <p:nvSpPr>
-          <p:cNvPr id="21" name="TextBox 44"/>
+          <p:cNvPr id="21" name="TextBox 95"/>
           <p:cNvSpPr txBox="1"/>
           <p:nvPr/>
         </p:nvSpPr>
@@ -4530,7 +7503,7 @@
       </p:sp>
       <p:sp>
         <p:nvSpPr>
-          <p:cNvPr id="22" name="TextBox 45"/>
+          <p:cNvPr id="22" name="TextBox 96"/>
           <p:cNvSpPr txBox="1"/>
           <p:nvPr/>
         </p:nvSpPr>
@@ -4573,7 +7546,7 @@
                 <a:latin typeface="Calibri"/>
                 <a:cs typeface="Calibri"/>
               </a:rPr>
-              <a:t>Writer is live</a:t>
+              <a:t>In your browser</a:t>
             </a:r>
             <a:endParaRPr lang="en-US" sz="1900" b="0" i="0" u="none" strike="noStrike" dirty="0">
               <a:solidFill>
@@ -4587,7 +7560,7 @@
       </p:sp>
       <p:sp>
         <p:nvSpPr>
-          <p:cNvPr id="23" name="TextBox 46"/>
+          <p:cNvPr id="23" name="TextBox 97"/>
           <p:cNvSpPr txBox="1"/>
           <p:nvPr/>
         </p:nvSpPr>
@@ -4630,7 +7603,7 @@
                 <a:latin typeface="Calibri"/>
                 <a:cs typeface="Calibri"/>
               </a:rPr>
-              <a:t>Writer is available on the web today.</a:t>
+              <a:t>Documents. Presentations. Spreadsheets.</a:t>
             </a:r>
             <a:endParaRPr lang="en-US" sz="2100" b="0" i="0" u="none" strike="noStrike" dirty="0">
               <a:solidFill>
@@ -4661,7 +7634,7 @@
                 <a:latin typeface="Calibri"/>
                 <a:cs typeface="Calibri"/>
               </a:rPr>
-              <a:t>More apps and platforms are on the way.</a:t>
+              <a:t>Across your devices. Built in the open.</a:t>
             </a:r>
             <a:endParaRPr lang="en-US" sz="2100" b="0" i="0" u="none" strike="noStrike" dirty="0">
               <a:solidFill>
@@ -4684,7 +7657,7 @@
 </p:sld>
 </file>
 
-<file path=ppt/slides/slide4.xml><?xml version="1.0" encoding="utf-8"?>
+<file path=ppt/slides/slide6.xml><?xml version="1.0" encoding="utf-8"?>
 <p:sld xmlns:a="http://schemas.openxmlformats.org/drawingml/2006/main" xmlns:r="http://schemas.openxmlformats.org/officeDocument/2006/relationships" xmlns:p="http://schemas.openxmlformats.org/presentationml/2006/main">
   <p:cSld>
     <p:bg>
@@ -4711,7 +7684,7 @@
       </p:grpSpPr>
       <p:sp>
         <p:nvSpPr>
-          <p:cNvPr id="2" name="TextBox 48"/>
+          <p:cNvPr id="2" name="TextBox 99"/>
           <p:cNvSpPr txBox="1"/>
           <p:nvPr/>
         </p:nvSpPr>
@@ -4754,7 +7727,7 @@
                 <a:latin typeface="Calibri"/>
                 <a:cs typeface="Calibri"/>
               </a:rPr>
-              <a:t>03  /  OPEN SOURCE. FROM THE START.</a:t>
+              <a:t>05  /  OPEN SOURCE. FROM THE START.</a:t>
             </a:r>
             <a:endParaRPr lang="en-US" sz="1600" b="1" i="0" u="none" strike="noStrike" dirty="0">
               <a:solidFill>
@@ -4768,7 +7741,7 @@
       </p:sp>
       <p:sp>
         <p:nvSpPr>
-          <p:cNvPr id="3" name="TextBox 49"/>
+          <p:cNvPr id="3" name="TextBox 100"/>
           <p:cNvSpPr txBox="1"/>
           <p:nvPr/>
         </p:nvSpPr>
@@ -4856,7 +7829,7 @@
       </p:sp>
       <p:sp>
         <p:nvSpPr>
-          <p:cNvPr id="4" name="TextBox 50"/>
+          <p:cNvPr id="4" name="TextBox 101"/>
           <p:cNvSpPr txBox="1"/>
           <p:nvPr/>
         </p:nvSpPr>
@@ -4944,7 +7917,7 @@
       </p:sp>
       <p:sp>
         <p:nvSpPr>
-          <p:cNvPr id="5" name="TextBox 51"/>
+          <p:cNvPr id="5" name="TextBox 102"/>
           <p:cNvSpPr txBox="1"/>
           <p:nvPr/>
         </p:nvSpPr>
@@ -5032,7 +8005,7 @@
       </p:sp>
       <p:sp>
         <p:nvSpPr>
-          <p:cNvPr id="6" name="TextBox 52"/>
+          <p:cNvPr id="6" name="TextBox 103"/>
           <p:cNvSpPr txBox="1"/>
           <p:nvPr/>
         </p:nvSpPr>
@@ -5075,7 +8048,7 @@
                 <a:latin typeface="Calibri"/>
                 <a:cs typeface="Calibri"/>
               </a:rPr>
-              <a:t>ONLY WRITER IS AVAILABLE SO FAR.</a:t>
+              <a:t>WRITER  ·  SLIDES  ·  SHEETS</a:t>
             </a:r>
             <a:endParaRPr lang="en-US" sz="1600" b="1" i="0" u="none" strike="noStrike" dirty="0">
               <a:solidFill>

--- a/slides/landing-wide.pptx
+++ b/slides/landing-wide.pptx
@@ -1705,7 +1705,7 @@
             <a:spLocks noGrp="1"/>
           </p:cNvSpPr>
           <p:nvPr>
-            <p:ph idx="1"/>
+            <p:ph type="body" idx="1"/>
           </p:nvPr>
         </p:nvSpPr>
         <p:spPr>
@@ -3578,30 +3578,55 @@
           </a:p>
         </p:txBody>
       </p:sp>
-      <p:pic>
-        <p:nvPicPr>
-          <p:cNvPr id="5" name="Picture 28"/>
-          <p:cNvPicPr>
-            <a:picLocks noChangeAspect="1"/>
-          </p:cNvPicPr>
-          <p:nvPr/>
-        </p:nvPicPr>
-        <p:blipFill>
-          <a:blip r:embed="rIdImg1"/>
-          <a:stretch>
-            <a:fillRect/>
-          </a:stretch>
-        </p:blipFill>
-        <p:spPr>
-          <a:xfrm>
-            <a:off x="7924800" y="1968500"/>
-            <a:ext cx="7620000" cy="5080000"/>
-          </a:xfrm>
-          <a:prstGeom prst="rect">
-            <a:avLst/>
-          </a:prstGeom>
-        </p:spPr>
-      </p:pic>
+      <p:sp>
+        <p:nvSpPr>
+          <p:cNvPr id="5" name="Rounded Rectangle 28"/>
+          <p:cNvSpPr/>
+          <p:nvPr/>
+        </p:nvSpPr>
+        <p:spPr>
+          <a:xfrm>
+            <a:off x="8382000" y="2286000"/>
+            <a:ext cx="6959600" cy="4445000"/>
+          </a:xfrm>
+          <a:prstGeom prst="roundRect">
+            <a:avLst/>
+          </a:prstGeom>
+          <a:solidFill>
+            <a:srgbClr val="FFFFFF"/>
+          </a:solidFill>
+          <a:ln>
+            <a:noFill/>
+          </a:ln>
+        </p:spPr>
+        <p:txBody>
+          <a:bodyPr wrap="square" lIns="91440" tIns="45720" rIns="91440" bIns="45720" anchor="ctr" rtlCol="0">
+            <a:noAutofit/>
+          </a:bodyPr>
+          <a:lstStyle/>
+          <a:p>
+            <a:pPr algn="ctr" marL="0" indent="0">
+              <a:lnSpc>
+                <a:spcPct val="100000"/>
+              </a:lnSpc>
+              <a:spcBef>
+                <a:spcPts val="0"/>
+              </a:spcBef>
+              <a:spcAft>
+                <a:spcPts val="0"/>
+              </a:spcAft>
+              <a:buNone/>
+            </a:pPr>
+            <a:endParaRPr lang="en-US" sz="1800" b="0" i="0" u="none" strike="noStrike" dirty="0">
+              <a:solidFill>
+                <a:srgbClr val="FFFFFF"/>
+              </a:solidFill>
+              <a:latin typeface="Calibri"/>
+              <a:cs typeface="Calibri"/>
+            </a:endParaRPr>
+          </a:p>
+        </p:txBody>
+      </p:sp>
       <p:sp>
         <p:nvSpPr>
           <p:cNvPr id="6" name="TextBox 29"/>
@@ -3610,6 +3635,404 @@
         </p:nvSpPr>
         <p:spPr>
           <a:xfrm>
+            <a:off x="8826500" y="2628900"/>
+            <a:ext cx="6070600" cy="6515100"/>
+          </a:xfrm>
+          <a:prstGeom prst="rect">
+            <a:avLst/>
+          </a:prstGeom>
+          <a:noFill/>
+          <a:ln>
+            <a:noFill/>
+          </a:ln>
+        </p:spPr>
+        <p:txBody>
+          <a:bodyPr wrap="square" lIns="0" tIns="0" rIns="0" bIns="0" anchor="t" rtlCol="0">
+            <a:spAutoFit/>
+          </a:bodyPr>
+          <a:lstStyle/>
+          <a:p>
+            <a:pPr algn="l" marL="0" indent="0">
+              <a:lnSpc>
+                <a:spcPct val="100000"/>
+              </a:lnSpc>
+              <a:spcBef>
+                <a:spcPts val="0"/>
+              </a:spcBef>
+              <a:spcAft>
+                <a:spcPts val="0"/>
+              </a:spcAft>
+              <a:buNone/>
+            </a:pPr>
+            <a:r>
+              <a:rPr lang="en-US" sz="1500" b="1" i="0" u="none" strike="noStrike" dirty="0">
+                <a:solidFill>
+                  <a:srgbClr val="2449DF"/>
+                </a:solidFill>
+                <a:latin typeface="Calibri"/>
+                <a:cs typeface="Calibri"/>
+              </a:rPr>
+              <a:t>PROJECT NOTES</a:t>
+            </a:r>
+            <a:endParaRPr lang="en-US" sz="1500" b="1" i="0" u="none" strike="noStrike" dirty="0">
+              <a:solidFill>
+                <a:srgbClr val="2449DF"/>
+              </a:solidFill>
+              <a:latin typeface="Calibri"/>
+              <a:cs typeface="Calibri"/>
+            </a:endParaRPr>
+          </a:p>
+        </p:txBody>
+      </p:sp>
+      <p:sp>
+        <p:nvSpPr>
+          <p:cNvPr id="7" name="TextBox 30"/>
+          <p:cNvSpPr txBox="1"/>
+          <p:nvPr/>
+        </p:nvSpPr>
+        <p:spPr>
+          <a:xfrm>
+            <a:off x="8826500" y="3111500"/>
+            <a:ext cx="6070600" cy="6032500"/>
+          </a:xfrm>
+          <a:prstGeom prst="rect">
+            <a:avLst/>
+          </a:prstGeom>
+          <a:noFill/>
+          <a:ln>
+            <a:noFill/>
+          </a:ln>
+        </p:spPr>
+        <p:txBody>
+          <a:bodyPr wrap="square" lIns="0" tIns="0" rIns="0" bIns="0" anchor="t" rtlCol="0">
+            <a:spAutoFit/>
+          </a:bodyPr>
+          <a:lstStyle/>
+          <a:p>
+            <a:pPr algn="l" marL="0" indent="0">
+              <a:lnSpc>
+                <a:spcPct val="100000"/>
+              </a:lnSpc>
+              <a:spcBef>
+                <a:spcPts val="0"/>
+              </a:spcBef>
+              <a:spcAft>
+                <a:spcPts val="0"/>
+              </a:spcAft>
+              <a:buNone/>
+            </a:pPr>
+            <a:r>
+              <a:rPr lang="en-US" sz="3600" b="1" i="0" u="none" strike="noStrike" dirty="0">
+                <a:solidFill>
+                  <a:srgbClr val="132442"/>
+                </a:solidFill>
+                <a:latin typeface="Calibri"/>
+                <a:cs typeface="Calibri"/>
+              </a:rPr>
+              <a:t>Your next big idea.</a:t>
+            </a:r>
+            <a:endParaRPr lang="en-US" sz="3600" b="1" i="0" u="none" strike="noStrike" dirty="0">
+              <a:solidFill>
+                <a:srgbClr val="132442"/>
+              </a:solidFill>
+              <a:latin typeface="Calibri"/>
+              <a:cs typeface="Calibri"/>
+            </a:endParaRPr>
+          </a:p>
+        </p:txBody>
+      </p:sp>
+      <p:sp>
+        <p:nvSpPr>
+          <p:cNvPr id="8" name="Rectangle 31"/>
+          <p:cNvSpPr/>
+          <p:nvPr/>
+        </p:nvSpPr>
+        <p:spPr>
+          <a:xfrm>
+            <a:off x="8826500" y="3873500"/>
+            <a:ext cx="6070600" cy="38100"/>
+          </a:xfrm>
+          <a:prstGeom prst="rect">
+            <a:avLst/>
+          </a:prstGeom>
+          <a:solidFill>
+            <a:srgbClr val="2449DF"/>
+          </a:solidFill>
+          <a:ln>
+            <a:noFill/>
+          </a:ln>
+        </p:spPr>
+        <p:txBody>
+          <a:bodyPr wrap="square" lIns="91440" tIns="45720" rIns="91440" bIns="45720" anchor="ctr" rtlCol="0">
+            <a:noAutofit/>
+          </a:bodyPr>
+          <a:lstStyle/>
+          <a:p>
+            <a:pPr algn="ctr" marL="0" indent="0">
+              <a:lnSpc>
+                <a:spcPct val="100000"/>
+              </a:lnSpc>
+              <a:spcBef>
+                <a:spcPts val="0"/>
+              </a:spcBef>
+              <a:spcAft>
+                <a:spcPts val="0"/>
+              </a:spcAft>
+              <a:buNone/>
+            </a:pPr>
+            <a:endParaRPr lang="en-US" sz="1800" b="0" i="0" u="none" strike="noStrike" dirty="0">
+              <a:solidFill>
+                <a:srgbClr val="FFFFFF"/>
+              </a:solidFill>
+              <a:latin typeface="Calibri"/>
+              <a:cs typeface="Calibri"/>
+            </a:endParaRPr>
+          </a:p>
+        </p:txBody>
+      </p:sp>
+      <p:sp>
+        <p:nvSpPr>
+          <p:cNvPr id="9" name="TextBox 32"/>
+          <p:cNvSpPr txBox="1"/>
+          <p:nvPr/>
+        </p:nvSpPr>
+        <p:spPr>
+          <a:xfrm>
+            <a:off x="8826500" y="4229100"/>
+            <a:ext cx="6070600" cy="4914900"/>
+          </a:xfrm>
+          <a:prstGeom prst="rect">
+            <a:avLst/>
+          </a:prstGeom>
+          <a:noFill/>
+          <a:ln>
+            <a:noFill/>
+          </a:ln>
+        </p:spPr>
+        <p:txBody>
+          <a:bodyPr wrap="square" lIns="0" tIns="0" rIns="0" bIns="0" anchor="t" rtlCol="0">
+            <a:spAutoFit/>
+          </a:bodyPr>
+          <a:lstStyle/>
+          <a:p>
+            <a:pPr algn="l" marL="0" indent="0">
+              <a:lnSpc>
+                <a:spcPct val="100000"/>
+              </a:lnSpc>
+              <a:spcBef>
+                <a:spcPts val="0"/>
+              </a:spcBef>
+              <a:spcAft>
+                <a:spcPts val="0"/>
+              </a:spcAft>
+              <a:buNone/>
+            </a:pPr>
+            <a:r>
+              <a:rPr lang="en-US" sz="2500" b="0" i="0" u="none" strike="noStrike" dirty="0">
+                <a:solidFill>
+                  <a:srgbClr val="536782"/>
+                </a:solidFill>
+                <a:latin typeface="Calibri"/>
+                <a:cs typeface="Calibri"/>
+              </a:rPr>
+              <a:t>Start with a thought.</a:t>
+            </a:r>
+            <a:endParaRPr lang="en-US" sz="2500" b="0" i="0" u="none" strike="noStrike" dirty="0">
+              <a:solidFill>
+                <a:srgbClr val="536782"/>
+              </a:solidFill>
+              <a:latin typeface="Calibri"/>
+              <a:cs typeface="Calibri"/>
+            </a:endParaRPr>
+          </a:p>
+          <a:p>
+            <a:pPr algn="l" marL="0" indent="0">
+              <a:lnSpc>
+                <a:spcPct val="100000"/>
+              </a:lnSpc>
+              <a:spcBef>
+                <a:spcPts val="0"/>
+              </a:spcBef>
+              <a:spcAft>
+                <a:spcPts val="0"/>
+              </a:spcAft>
+              <a:buNone/>
+            </a:pPr>
+            <a:r>
+              <a:rPr lang="en-US" sz="2500" b="0" i="0" u="none" strike="noStrike" dirty="0">
+                <a:solidFill>
+                  <a:srgbClr val="536782"/>
+                </a:solidFill>
+                <a:latin typeface="Calibri"/>
+                <a:cs typeface="Calibri"/>
+              </a:rPr>
+              <a:t>Give it room to grow.</a:t>
+            </a:r>
+            <a:endParaRPr lang="en-US" sz="2500" b="0" i="0" u="none" strike="noStrike" dirty="0">
+              <a:solidFill>
+                <a:srgbClr val="536782"/>
+              </a:solidFill>
+              <a:latin typeface="Calibri"/>
+              <a:cs typeface="Calibri"/>
+            </a:endParaRPr>
+          </a:p>
+        </p:txBody>
+      </p:sp>
+      <p:sp>
+        <p:nvSpPr>
+          <p:cNvPr id="10" name="Rounded Rectangle 33"/>
+          <p:cNvSpPr/>
+          <p:nvPr/>
+        </p:nvSpPr>
+        <p:spPr>
+          <a:xfrm>
+            <a:off x="8826500" y="5461000"/>
+            <a:ext cx="5461000" cy="101600"/>
+          </a:xfrm>
+          <a:prstGeom prst="roundRect">
+            <a:avLst/>
+          </a:prstGeom>
+          <a:solidFill>
+            <a:srgbClr val="E3E9FA"/>
+          </a:solidFill>
+          <a:ln>
+            <a:noFill/>
+          </a:ln>
+        </p:spPr>
+        <p:txBody>
+          <a:bodyPr wrap="square" lIns="91440" tIns="45720" rIns="91440" bIns="45720" anchor="ctr" rtlCol="0">
+            <a:noAutofit/>
+          </a:bodyPr>
+          <a:lstStyle/>
+          <a:p>
+            <a:pPr algn="ctr" marL="0" indent="0">
+              <a:lnSpc>
+                <a:spcPct val="100000"/>
+              </a:lnSpc>
+              <a:spcBef>
+                <a:spcPts val="0"/>
+              </a:spcBef>
+              <a:spcAft>
+                <a:spcPts val="0"/>
+              </a:spcAft>
+              <a:buNone/>
+            </a:pPr>
+            <a:endParaRPr lang="en-US" sz="1800" b="0" i="0" u="none" strike="noStrike" dirty="0">
+              <a:solidFill>
+                <a:srgbClr val="FFFFFF"/>
+              </a:solidFill>
+              <a:latin typeface="Calibri"/>
+              <a:cs typeface="Calibri"/>
+            </a:endParaRPr>
+          </a:p>
+        </p:txBody>
+      </p:sp>
+      <p:sp>
+        <p:nvSpPr>
+          <p:cNvPr id="11" name="Rounded Rectangle 34"/>
+          <p:cNvSpPr/>
+          <p:nvPr/>
+        </p:nvSpPr>
+        <p:spPr>
+          <a:xfrm>
+            <a:off x="8826500" y="5765800"/>
+            <a:ext cx="6070600" cy="101600"/>
+          </a:xfrm>
+          <a:prstGeom prst="roundRect">
+            <a:avLst/>
+          </a:prstGeom>
+          <a:solidFill>
+            <a:srgbClr val="E3E9FA"/>
+          </a:solidFill>
+          <a:ln>
+            <a:noFill/>
+          </a:ln>
+        </p:spPr>
+        <p:txBody>
+          <a:bodyPr wrap="square" lIns="91440" tIns="45720" rIns="91440" bIns="45720" anchor="ctr" rtlCol="0">
+            <a:noAutofit/>
+          </a:bodyPr>
+          <a:lstStyle/>
+          <a:p>
+            <a:pPr algn="ctr" marL="0" indent="0">
+              <a:lnSpc>
+                <a:spcPct val="100000"/>
+              </a:lnSpc>
+              <a:spcBef>
+                <a:spcPts val="0"/>
+              </a:spcBef>
+              <a:spcAft>
+                <a:spcPts val="0"/>
+              </a:spcAft>
+              <a:buNone/>
+            </a:pPr>
+            <a:endParaRPr lang="en-US" sz="1800" b="0" i="0" u="none" strike="noStrike" dirty="0">
+              <a:solidFill>
+                <a:srgbClr val="FFFFFF"/>
+              </a:solidFill>
+              <a:latin typeface="Calibri"/>
+              <a:cs typeface="Calibri"/>
+            </a:endParaRPr>
+          </a:p>
+        </p:txBody>
+      </p:sp>
+      <p:sp>
+        <p:nvSpPr>
+          <p:cNvPr id="12" name="Rounded Rectangle 35"/>
+          <p:cNvSpPr/>
+          <p:nvPr/>
+        </p:nvSpPr>
+        <p:spPr>
+          <a:xfrm>
+            <a:off x="8826500" y="6070600"/>
+            <a:ext cx="4191000" cy="101600"/>
+          </a:xfrm>
+          <a:prstGeom prst="roundRect">
+            <a:avLst/>
+          </a:prstGeom>
+          <a:solidFill>
+            <a:srgbClr val="E3E9FA"/>
+          </a:solidFill>
+          <a:ln>
+            <a:noFill/>
+          </a:ln>
+        </p:spPr>
+        <p:txBody>
+          <a:bodyPr wrap="square" lIns="91440" tIns="45720" rIns="91440" bIns="45720" anchor="ctr" rtlCol="0">
+            <a:noAutofit/>
+          </a:bodyPr>
+          <a:lstStyle/>
+          <a:p>
+            <a:pPr algn="ctr" marL="0" indent="0">
+              <a:lnSpc>
+                <a:spcPct val="100000"/>
+              </a:lnSpc>
+              <a:spcBef>
+                <a:spcPts val="0"/>
+              </a:spcBef>
+              <a:spcAft>
+                <a:spcPts val="0"/>
+              </a:spcAft>
+              <a:buNone/>
+            </a:pPr>
+            <a:endParaRPr lang="en-US" sz="1800" b="0" i="0" u="none" strike="noStrike" dirty="0">
+              <a:solidFill>
+                <a:srgbClr val="FFFFFF"/>
+              </a:solidFill>
+              <a:latin typeface="Calibri"/>
+              <a:cs typeface="Calibri"/>
+            </a:endParaRPr>
+          </a:p>
+        </p:txBody>
+      </p:sp>
+      <p:sp>
+        <p:nvSpPr>
+          <p:cNvPr id="13" name="TextBox 36"/>
+          <p:cNvSpPr txBox="1"/>
+          <p:nvPr/>
+        </p:nvSpPr>
+        <p:spPr>
+          <a:xfrm>
             <a:off x="914400" y="7937500"/>
             <a:ext cx="14427200" cy="1206500"/>
           </a:xfrm>
@@ -3661,7 +4084,7 @@
       </p:sp>
       <p:sp>
         <p:nvSpPr>
-          <p:cNvPr id="7" name="TextBox 30"/>
+          <p:cNvPr id="14" name="TextBox 37"/>
           <p:cNvSpPr txBox="1"/>
           <p:nvPr/>
         </p:nvSpPr>
@@ -3785,7 +4208,7 @@
       </p:grpSpPr>
       <p:sp>
         <p:nvSpPr>
-          <p:cNvPr id="2" name="TextBox 32"/>
+          <p:cNvPr id="2" name="TextBox 39"/>
           <p:cNvSpPr txBox="1"/>
           <p:nvPr/>
         </p:nvSpPr>
@@ -3842,7 +4265,7 @@
       </p:sp>
       <p:sp>
         <p:nvSpPr>
-          <p:cNvPr id="3" name="TextBox 33"/>
+          <p:cNvPr id="3" name="TextBox 40"/>
           <p:cNvSpPr txBox="1"/>
           <p:nvPr/>
         </p:nvSpPr>
@@ -3930,7 +4353,7 @@
       </p:sp>
       <p:sp>
         <p:nvSpPr>
-          <p:cNvPr id="4" name="TextBox 34"/>
+          <p:cNvPr id="4" name="TextBox 41"/>
           <p:cNvSpPr txBox="1"/>
           <p:nvPr/>
         </p:nvSpPr>
@@ -4018,7 +4441,7 @@
       </p:sp>
       <p:sp>
         <p:nvSpPr>
-          <p:cNvPr id="5" name="Rounded Rectangle 35"/>
+          <p:cNvPr id="5" name="Rounded Rectangle 42"/>
           <p:cNvSpPr/>
           <p:nvPr/>
         </p:nvSpPr>
@@ -4067,7 +4490,7 @@
       </p:sp>
       <p:sp>
         <p:nvSpPr>
-          <p:cNvPr id="6" name="TextBox 36"/>
+          <p:cNvPr id="6" name="TextBox 43"/>
           <p:cNvSpPr txBox="1"/>
           <p:nvPr/>
         </p:nvSpPr>
@@ -4124,7 +4547,7 @@
       </p:sp>
       <p:sp>
         <p:nvSpPr>
-          <p:cNvPr id="7" name="TextBox 37"/>
+          <p:cNvPr id="7" name="TextBox 44"/>
           <p:cNvSpPr txBox="1"/>
           <p:nvPr/>
         </p:nvSpPr>
@@ -4181,7 +4604,7 @@
       </p:sp>
       <p:sp>
         <p:nvSpPr>
-          <p:cNvPr id="8" name="Rounded Rectangle 38"/>
+          <p:cNvPr id="8" name="Rounded Rectangle 45"/>
           <p:cNvSpPr/>
           <p:nvPr/>
         </p:nvSpPr>
@@ -4230,7 +4653,7 @@
       </p:sp>
       <p:sp>
         <p:nvSpPr>
-          <p:cNvPr id="9" name="Rounded Rectangle 39"/>
+          <p:cNvPr id="9" name="Rounded Rectangle 46"/>
           <p:cNvSpPr/>
           <p:nvPr/>
         </p:nvSpPr>
@@ -4279,7 +4702,7 @@
       </p:sp>
       <p:sp>
         <p:nvSpPr>
-          <p:cNvPr id="10" name="Rounded Rectangle 40"/>
+          <p:cNvPr id="10" name="Rounded Rectangle 47"/>
           <p:cNvSpPr/>
           <p:nvPr/>
         </p:nvSpPr>
@@ -4328,7 +4751,7 @@
       </p:sp>
       <p:sp>
         <p:nvSpPr>
-          <p:cNvPr id="11" name="TextBox 41"/>
+          <p:cNvPr id="11" name="TextBox 48"/>
           <p:cNvSpPr txBox="1"/>
           <p:nvPr/>
         </p:nvSpPr>
@@ -4385,7 +4808,7 @@
       </p:sp>
       <p:sp>
         <p:nvSpPr>
-          <p:cNvPr id="12" name="TextBox 42"/>
+          <p:cNvPr id="12" name="TextBox 49"/>
           <p:cNvSpPr txBox="1"/>
           <p:nvPr/>
         </p:nvSpPr>
@@ -4442,7 +4865,7 @@
       </p:sp>
       <p:sp>
         <p:nvSpPr>
-          <p:cNvPr id="13" name="TextBox 43"/>
+          <p:cNvPr id="13" name="TextBox 50"/>
           <p:cNvSpPr txBox="1"/>
           <p:nvPr/>
         </p:nvSpPr>
@@ -4499,7 +4922,7 @@
       </p:sp>
       <p:sp>
         <p:nvSpPr>
-          <p:cNvPr id="14" name="TextBox 44"/>
+          <p:cNvPr id="14" name="TextBox 51"/>
           <p:cNvSpPr txBox="1"/>
           <p:nvPr/>
         </p:nvSpPr>
@@ -4587,7 +5010,7 @@
       </p:sp>
       <p:sp>
         <p:nvSpPr>
-          <p:cNvPr id="15" name="TextBox 45"/>
+          <p:cNvPr id="15" name="TextBox 52"/>
           <p:cNvSpPr txBox="1"/>
           <p:nvPr/>
         </p:nvSpPr>
@@ -4680,7 +5103,7 @@
       </p:grpSpPr>
       <p:sp>
         <p:nvSpPr>
-          <p:cNvPr id="2" name="TextBox 47"/>
+          <p:cNvPr id="2" name="TextBox 54"/>
           <p:cNvSpPr txBox="1"/>
           <p:nvPr/>
         </p:nvSpPr>
@@ -4737,7 +5160,7 @@
       </p:sp>
       <p:sp>
         <p:nvSpPr>
-          <p:cNvPr id="3" name="TextBox 48"/>
+          <p:cNvPr id="3" name="TextBox 55"/>
           <p:cNvSpPr txBox="1"/>
           <p:nvPr/>
         </p:nvSpPr>
@@ -4825,7 +5248,7 @@
       </p:sp>
       <p:sp>
         <p:nvSpPr>
-          <p:cNvPr id="4" name="TextBox 49"/>
+          <p:cNvPr id="4" name="TextBox 56"/>
           <p:cNvSpPr txBox="1"/>
           <p:nvPr/>
         </p:nvSpPr>
@@ -4913,7 +5336,7 @@
       </p:sp>
       <p:sp>
         <p:nvSpPr>
-          <p:cNvPr id="5" name="Rounded Rectangle 50"/>
+          <p:cNvPr id="5" name="Rounded Rectangle 57"/>
           <p:cNvSpPr/>
           <p:nvPr/>
         </p:nvSpPr>
@@ -4962,7 +5385,7 @@
       </p:sp>
       <p:sp>
         <p:nvSpPr>
-          <p:cNvPr id="6" name="Rounded Rectangle 51"/>
+          <p:cNvPr id="6" name="Rounded Rectangle 58"/>
           <p:cNvSpPr/>
           <p:nvPr/>
         </p:nvSpPr>
@@ -5011,7 +5434,7 @@
       </p:sp>
       <p:sp>
         <p:nvSpPr>
-          <p:cNvPr id="7" name="TextBox 52"/>
+          <p:cNvPr id="7" name="TextBox 59"/>
           <p:cNvSpPr txBox="1"/>
           <p:nvPr/>
         </p:nvSpPr>
@@ -5068,7 +5491,7 @@
       </p:sp>
       <p:sp>
         <p:nvSpPr>
-          <p:cNvPr id="8" name="Rectangle 53"/>
+          <p:cNvPr id="8" name="Rectangle 60"/>
           <p:cNvSpPr/>
           <p:nvPr/>
         </p:nvSpPr>
@@ -5117,7 +5540,7 @@
       </p:sp>
       <p:sp>
         <p:nvSpPr>
-          <p:cNvPr id="9" name="TextBox 54"/>
+          <p:cNvPr id="9" name="TextBox 61"/>
           <p:cNvSpPr txBox="1"/>
           <p:nvPr/>
         </p:nvSpPr>
@@ -5174,7 +5597,7 @@
       </p:sp>
       <p:sp>
         <p:nvSpPr>
-          <p:cNvPr id="10" name="TextBox 55"/>
+          <p:cNvPr id="10" name="TextBox 62"/>
           <p:cNvSpPr txBox="1"/>
           <p:nvPr/>
         </p:nvSpPr>
@@ -5231,7 +5654,7 @@
       </p:sp>
       <p:sp>
         <p:nvSpPr>
-          <p:cNvPr id="11" name="TextBox 56"/>
+          <p:cNvPr id="11" name="TextBox 63"/>
           <p:cNvSpPr txBox="1"/>
           <p:nvPr/>
         </p:nvSpPr>
@@ -5288,7 +5711,7 @@
       </p:sp>
       <p:sp>
         <p:nvSpPr>
-          <p:cNvPr id="12" name="Rectangle 57"/>
+          <p:cNvPr id="12" name="Rectangle 64"/>
           <p:cNvSpPr/>
           <p:nvPr/>
         </p:nvSpPr>
@@ -5337,7 +5760,7 @@
       </p:sp>
       <p:sp>
         <p:nvSpPr>
-          <p:cNvPr id="13" name="TextBox 58"/>
+          <p:cNvPr id="13" name="TextBox 65"/>
           <p:cNvSpPr txBox="1"/>
           <p:nvPr/>
         </p:nvSpPr>
@@ -5394,7 +5817,7 @@
       </p:sp>
       <p:sp>
         <p:nvSpPr>
-          <p:cNvPr id="14" name="TextBox 59"/>
+          <p:cNvPr id="14" name="TextBox 66"/>
           <p:cNvSpPr txBox="1"/>
           <p:nvPr/>
         </p:nvSpPr>
@@ -5451,7 +5874,7 @@
       </p:sp>
       <p:sp>
         <p:nvSpPr>
-          <p:cNvPr id="15" name="TextBox 60"/>
+          <p:cNvPr id="15" name="TextBox 67"/>
           <p:cNvSpPr txBox="1"/>
           <p:nvPr/>
         </p:nvSpPr>
@@ -5508,7 +5931,7 @@
       </p:sp>
       <p:sp>
         <p:nvSpPr>
-          <p:cNvPr id="16" name="Rectangle 61"/>
+          <p:cNvPr id="16" name="Rectangle 68"/>
           <p:cNvSpPr/>
           <p:nvPr/>
         </p:nvSpPr>
@@ -5557,7 +5980,7 @@
       </p:sp>
       <p:sp>
         <p:nvSpPr>
-          <p:cNvPr id="17" name="TextBox 62"/>
+          <p:cNvPr id="17" name="TextBox 69"/>
           <p:cNvSpPr txBox="1"/>
           <p:nvPr/>
         </p:nvSpPr>
@@ -5614,7 +6037,7 @@
       </p:sp>
       <p:sp>
         <p:nvSpPr>
-          <p:cNvPr id="18" name="TextBox 63"/>
+          <p:cNvPr id="18" name="TextBox 70"/>
           <p:cNvSpPr txBox="1"/>
           <p:nvPr/>
         </p:nvSpPr>
@@ -5671,7 +6094,7 @@
       </p:sp>
       <p:sp>
         <p:nvSpPr>
-          <p:cNvPr id="19" name="TextBox 64"/>
+          <p:cNvPr id="19" name="TextBox 71"/>
           <p:cNvSpPr txBox="1"/>
           <p:nvPr/>
         </p:nvSpPr>
@@ -5728,7 +6151,7 @@
       </p:sp>
       <p:sp>
         <p:nvSpPr>
-          <p:cNvPr id="20" name="Rectangle 65"/>
+          <p:cNvPr id="20" name="Rectangle 72"/>
           <p:cNvSpPr/>
           <p:nvPr/>
         </p:nvSpPr>
@@ -5777,7 +6200,7 @@
       </p:sp>
       <p:sp>
         <p:nvSpPr>
-          <p:cNvPr id="21" name="TextBox 66"/>
+          <p:cNvPr id="21" name="TextBox 73"/>
           <p:cNvSpPr txBox="1"/>
           <p:nvPr/>
         </p:nvSpPr>
@@ -5834,7 +6257,7 @@
       </p:sp>
       <p:sp>
         <p:nvSpPr>
-          <p:cNvPr id="22" name="TextBox 67"/>
+          <p:cNvPr id="22" name="TextBox 74"/>
           <p:cNvSpPr txBox="1"/>
           <p:nvPr/>
         </p:nvSpPr>
@@ -5891,7 +6314,7 @@
       </p:sp>
       <p:sp>
         <p:nvSpPr>
-          <p:cNvPr id="23" name="TextBox 68"/>
+          <p:cNvPr id="23" name="TextBox 75"/>
           <p:cNvSpPr txBox="1"/>
           <p:nvPr/>
         </p:nvSpPr>
@@ -5948,7 +6371,7 @@
       </p:sp>
       <p:sp>
         <p:nvSpPr>
-          <p:cNvPr id="24" name="Rectangle 69"/>
+          <p:cNvPr id="24" name="Rectangle 76"/>
           <p:cNvSpPr/>
           <p:nvPr/>
         </p:nvSpPr>
@@ -5997,7 +6420,7 @@
       </p:sp>
       <p:sp>
         <p:nvSpPr>
-          <p:cNvPr id="25" name="TextBox 70"/>
+          <p:cNvPr id="25" name="TextBox 77"/>
           <p:cNvSpPr txBox="1"/>
           <p:nvPr/>
         </p:nvSpPr>
@@ -6054,7 +6477,7 @@
       </p:sp>
       <p:sp>
         <p:nvSpPr>
-          <p:cNvPr id="26" name="TextBox 71"/>
+          <p:cNvPr id="26" name="TextBox 78"/>
           <p:cNvSpPr txBox="1"/>
           <p:nvPr/>
         </p:nvSpPr>
@@ -6111,7 +6534,7 @@
       </p:sp>
       <p:sp>
         <p:nvSpPr>
-          <p:cNvPr id="27" name="TextBox 72"/>
+          <p:cNvPr id="27" name="TextBox 79"/>
           <p:cNvSpPr txBox="1"/>
           <p:nvPr/>
         </p:nvSpPr>
@@ -6168,7 +6591,7 @@
       </p:sp>
       <p:sp>
         <p:nvSpPr>
-          <p:cNvPr id="28" name="TextBox 73"/>
+          <p:cNvPr id="28" name="TextBox 80"/>
           <p:cNvSpPr txBox="1"/>
           <p:nvPr/>
         </p:nvSpPr>
@@ -6256,7 +6679,7 @@
       </p:sp>
       <p:sp>
         <p:nvSpPr>
-          <p:cNvPr id="29" name="TextBox 74"/>
+          <p:cNvPr id="29" name="TextBox 81"/>
           <p:cNvSpPr txBox="1"/>
           <p:nvPr/>
         </p:nvSpPr>
@@ -6349,7 +6772,7 @@
       </p:grpSpPr>
       <p:sp>
         <p:nvSpPr>
-          <p:cNvPr id="2" name="TextBox 76"/>
+          <p:cNvPr id="2" name="TextBox 83"/>
           <p:cNvSpPr txBox="1"/>
           <p:nvPr/>
         </p:nvSpPr>
@@ -6406,7 +6829,7 @@
       </p:sp>
       <p:sp>
         <p:nvSpPr>
-          <p:cNvPr id="3" name="TextBox 77"/>
+          <p:cNvPr id="3" name="TextBox 84"/>
           <p:cNvSpPr txBox="1"/>
           <p:nvPr/>
         </p:nvSpPr>
@@ -6494,7 +6917,7 @@
       </p:sp>
       <p:sp>
         <p:nvSpPr>
-          <p:cNvPr id="4" name="TextBox 78"/>
+          <p:cNvPr id="4" name="TextBox 85"/>
           <p:cNvSpPr txBox="1"/>
           <p:nvPr/>
         </p:nvSpPr>
@@ -6582,7 +7005,7 @@
       </p:sp>
       <p:sp>
         <p:nvSpPr>
-          <p:cNvPr id="5" name="Rounded Rectangle 79"/>
+          <p:cNvPr id="5" name="Rounded Rectangle 86"/>
           <p:cNvSpPr/>
           <p:nvPr/>
         </p:nvSpPr>
@@ -6631,7 +7054,7 @@
       </p:sp>
       <p:sp>
         <p:nvSpPr>
-          <p:cNvPr id="6" name="TextBox 80"/>
+          <p:cNvPr id="6" name="TextBox 87"/>
           <p:cNvSpPr txBox="1"/>
           <p:nvPr/>
         </p:nvSpPr>
@@ -6688,7 +7111,7 @@
       </p:sp>
       <p:sp>
         <p:nvSpPr>
-          <p:cNvPr id="7" name="TextBox 81"/>
+          <p:cNvPr id="7" name="TextBox 88"/>
           <p:cNvSpPr txBox="1"/>
           <p:nvPr/>
         </p:nvSpPr>
@@ -6745,7 +7168,7 @@
       </p:sp>
       <p:sp>
         <p:nvSpPr>
-          <p:cNvPr id="8" name="Rounded Rectangle 82"/>
+          <p:cNvPr id="8" name="Rounded Rectangle 89"/>
           <p:cNvSpPr/>
           <p:nvPr/>
         </p:nvSpPr>
@@ -6794,7 +7217,7 @@
       </p:sp>
       <p:sp>
         <p:nvSpPr>
-          <p:cNvPr id="9" name="TextBox 83"/>
+          <p:cNvPr id="9" name="TextBox 90"/>
           <p:cNvSpPr txBox="1"/>
           <p:nvPr/>
         </p:nvSpPr>
@@ -6851,7 +7274,7 @@
       </p:sp>
       <p:sp>
         <p:nvSpPr>
-          <p:cNvPr id="10" name="TextBox 84"/>
+          <p:cNvPr id="10" name="TextBox 91"/>
           <p:cNvSpPr txBox="1"/>
           <p:nvPr/>
         </p:nvSpPr>
@@ -6908,7 +7331,7 @@
       </p:sp>
       <p:sp>
         <p:nvSpPr>
-          <p:cNvPr id="11" name="Rounded Rectangle 85"/>
+          <p:cNvPr id="11" name="Rounded Rectangle 92"/>
           <p:cNvSpPr/>
           <p:nvPr/>
         </p:nvSpPr>
@@ -6957,7 +7380,7 @@
       </p:sp>
       <p:sp>
         <p:nvSpPr>
-          <p:cNvPr id="12" name="TextBox 86"/>
+          <p:cNvPr id="12" name="TextBox 93"/>
           <p:cNvSpPr txBox="1"/>
           <p:nvPr/>
         </p:nvSpPr>
@@ -7014,7 +7437,7 @@
       </p:sp>
       <p:sp>
         <p:nvSpPr>
-          <p:cNvPr id="13" name="TextBox 87"/>
+          <p:cNvPr id="13" name="TextBox 94"/>
           <p:cNvSpPr txBox="1"/>
           <p:nvPr/>
         </p:nvSpPr>
@@ -7071,7 +7494,7 @@
       </p:sp>
       <p:sp>
         <p:nvSpPr>
-          <p:cNvPr id="14" name="Rounded Rectangle 88"/>
+          <p:cNvPr id="14" name="Rounded Rectangle 95"/>
           <p:cNvSpPr/>
           <p:nvPr/>
         </p:nvSpPr>
@@ -7120,7 +7543,7 @@
       </p:sp>
       <p:sp>
         <p:nvSpPr>
-          <p:cNvPr id="15" name="TextBox 89"/>
+          <p:cNvPr id="15" name="TextBox 96"/>
           <p:cNvSpPr txBox="1"/>
           <p:nvPr/>
         </p:nvSpPr>
@@ -7177,7 +7600,7 @@
       </p:sp>
       <p:sp>
         <p:nvSpPr>
-          <p:cNvPr id="16" name="TextBox 90"/>
+          <p:cNvPr id="16" name="TextBox 97"/>
           <p:cNvSpPr txBox="1"/>
           <p:nvPr/>
         </p:nvSpPr>
@@ -7234,7 +7657,7 @@
       </p:sp>
       <p:sp>
         <p:nvSpPr>
-          <p:cNvPr id="17" name="Rounded Rectangle 91"/>
+          <p:cNvPr id="17" name="Rounded Rectangle 98"/>
           <p:cNvSpPr/>
           <p:nvPr/>
         </p:nvSpPr>
@@ -7283,7 +7706,7 @@
       </p:sp>
       <p:sp>
         <p:nvSpPr>
-          <p:cNvPr id="18" name="TextBox 92"/>
+          <p:cNvPr id="18" name="TextBox 99"/>
           <p:cNvSpPr txBox="1"/>
           <p:nvPr/>
         </p:nvSpPr>
@@ -7340,7 +7763,7 @@
       </p:sp>
       <p:sp>
         <p:nvSpPr>
-          <p:cNvPr id="19" name="TextBox 93"/>
+          <p:cNvPr id="19" name="TextBox 100"/>
           <p:cNvSpPr txBox="1"/>
           <p:nvPr/>
         </p:nvSpPr>
@@ -7397,7 +7820,7 @@
       </p:sp>
       <p:sp>
         <p:nvSpPr>
-          <p:cNvPr id="20" name="Rounded Rectangle 94"/>
+          <p:cNvPr id="20" name="Rounded Rectangle 101"/>
           <p:cNvSpPr/>
           <p:nvPr/>
         </p:nvSpPr>
@@ -7446,7 +7869,7 @@
       </p:sp>
       <p:sp>
         <p:nvSpPr>
-          <p:cNvPr id="21" name="TextBox 95"/>
+          <p:cNvPr id="21" name="TextBox 102"/>
           <p:cNvSpPr txBox="1"/>
           <p:nvPr/>
         </p:nvSpPr>
@@ -7503,7 +7926,7 @@
       </p:sp>
       <p:sp>
         <p:nvSpPr>
-          <p:cNvPr id="22" name="TextBox 96"/>
+          <p:cNvPr id="22" name="TextBox 103"/>
           <p:cNvSpPr txBox="1"/>
           <p:nvPr/>
         </p:nvSpPr>
@@ -7560,7 +7983,7 @@
       </p:sp>
       <p:sp>
         <p:nvSpPr>
-          <p:cNvPr id="23" name="TextBox 97"/>
+          <p:cNvPr id="23" name="TextBox 104"/>
           <p:cNvSpPr txBox="1"/>
           <p:nvPr/>
         </p:nvSpPr>
@@ -7684,7 +8107,7 @@
       </p:grpSpPr>
       <p:sp>
         <p:nvSpPr>
-          <p:cNvPr id="2" name="TextBox 99"/>
+          <p:cNvPr id="2" name="TextBox 106"/>
           <p:cNvSpPr txBox="1"/>
           <p:nvPr/>
         </p:nvSpPr>
@@ -7741,7 +8164,7 @@
       </p:sp>
       <p:sp>
         <p:nvSpPr>
-          <p:cNvPr id="3" name="TextBox 100"/>
+          <p:cNvPr id="3" name="TextBox 107"/>
           <p:cNvSpPr txBox="1"/>
           <p:nvPr/>
         </p:nvSpPr>
@@ -7829,7 +8252,7 @@
       </p:sp>
       <p:sp>
         <p:nvSpPr>
-          <p:cNvPr id="4" name="TextBox 101"/>
+          <p:cNvPr id="4" name="TextBox 108"/>
           <p:cNvSpPr txBox="1"/>
           <p:nvPr/>
         </p:nvSpPr>
@@ -7917,7 +8340,7 @@
       </p:sp>
       <p:sp>
         <p:nvSpPr>
-          <p:cNvPr id="5" name="TextBox 102"/>
+          <p:cNvPr id="5" name="TextBox 109"/>
           <p:cNvSpPr txBox="1"/>
           <p:nvPr/>
         </p:nvSpPr>
@@ -8005,7 +8428,7 @@
       </p:sp>
       <p:sp>
         <p:nvSpPr>
-          <p:cNvPr id="6" name="TextBox 103"/>
+          <p:cNvPr id="6" name="TextBox 110"/>
           <p:cNvSpPr txBox="1"/>
           <p:nvPr/>
         </p:nvSpPr>

--- a/slides/landing-wide.pptx
+++ b/slides/landing-wide.pptx
@@ -8346,6 +8346,63 @@
         </p:nvSpPr>
         <p:spPr>
           <a:xfrm>
+            <a:off x="914400" y="6477000"/>
+            <a:ext cx="14427200" cy="2667000"/>
+          </a:xfrm>
+          <a:prstGeom prst="rect">
+            <a:avLst/>
+          </a:prstGeom>
+          <a:noFill/>
+          <a:ln>
+            <a:noFill/>
+          </a:ln>
+        </p:spPr>
+        <p:txBody>
+          <a:bodyPr wrap="square" lIns="0" tIns="0" rIns="0" bIns="0" anchor="t" rtlCol="0">
+            <a:spAutoFit/>
+          </a:bodyPr>
+          <a:lstStyle/>
+          <a:p>
+            <a:pPr algn="l" marL="0" indent="0">
+              <a:lnSpc>
+                <a:spcPct val="100000"/>
+              </a:lnSpc>
+              <a:spcBef>
+                <a:spcPts val="0"/>
+              </a:spcBef>
+              <a:spcAft>
+                <a:spcPts val="0"/>
+              </a:spcAft>
+              <a:buNone/>
+            </a:pPr>
+            <a:r>
+              <a:rPr lang="en-US" sz="2800" b="1" i="0" u="none" strike="noStrike" dirty="0">
+                <a:solidFill>
+                  <a:srgbClr val="FFFFFF"/>
+                </a:solidFill>
+                <a:latin typeface="Calibri"/>
+                <a:cs typeface="Calibri"/>
+              </a:rPr>
+              <a:t>github.com/starling-build/starling</a:t>
+            </a:r>
+            <a:endParaRPr lang="en-US" sz="2800" b="1" i="0" u="none" strike="noStrike" dirty="0">
+              <a:solidFill>
+                <a:srgbClr val="FFFFFF"/>
+              </a:solidFill>
+              <a:latin typeface="Calibri"/>
+              <a:cs typeface="Calibri"/>
+            </a:endParaRPr>
+          </a:p>
+        </p:txBody>
+      </p:sp>
+      <p:sp>
+        <p:nvSpPr>
+          <p:cNvPr id="6" name="TextBox 110"/>
+          <p:cNvSpPr txBox="1"/>
+          <p:nvPr/>
+        </p:nvSpPr>
+        <p:spPr>
+          <a:xfrm>
             <a:off x="914400" y="7239000"/>
             <a:ext cx="14427200" cy="1905000"/>
           </a:xfrm>
@@ -8428,7 +8485,7 @@
       </p:sp>
       <p:sp>
         <p:nvSpPr>
-          <p:cNvPr id="6" name="TextBox 110"/>
+          <p:cNvPr id="7" name="TextBox 111"/>
           <p:cNvSpPr txBox="1"/>
           <p:nvPr/>
         </p:nvSpPr>
